--- a/VPL_poster.pptx
+++ b/VPL_poster.pptx
@@ -5,9 +5,9 @@
     <p:sldMasterId id="2147483648" r:id="rId1"/>
   </p:sldMasterIdLst>
   <p:sldIdLst>
-    <p:sldId id="256" r:id="rId7"/>
+    <p:sldId id="256" r:id="rId2"/>
   </p:sldIdLst>
-  <p:sldSz cx="30275784" cy="42803064" type="screen4x3"/>
+  <p:sldSz cx="30275213" cy="42803763"/>
   <p:notesSz cx="6858000" cy="9144000"/>
   <p:defaultTextStyle>
     <a:defPPr>
@@ -104,6 +104,22 @@
       </a:defRPr>
     </a:lvl9pPr>
   </p:defaultTextStyle>
+  <p:extLst>
+    <p:ext uri="{EFAFB233-063F-42B5-8137-9DF3F51BA10A}">
+      <p15:sldGuideLst xmlns:p15="http://schemas.microsoft.com/office/powerpoint/2012/main">
+        <p15:guide id="1" orient="horz" pos="2160">
+          <p15:clr>
+            <a:srgbClr val="A4A3A4"/>
+          </p15:clr>
+        </p15:guide>
+        <p15:guide id="2" pos="2880">
+          <p15:clr>
+            <a:srgbClr val="A4A3A4"/>
+          </p15:clr>
+        </p15:guide>
+      </p15:sldGuideLst>
+    </p:ext>
+  </p:extLst>
 </p:presentation>
 </file>
 
@@ -145,10 +161,9 @@
           <a:lstStyle/>
           <a:p>
             <a:r>
-              <a:rPr lang="en-US" smtClean="0"/>
+              <a:rPr lang="en-US"/>
               <a:t>Click to edit Master title style</a:t>
             </a:r>
-            <a:endParaRPr lang="en-US"/>
           </a:p>
         </p:txBody>
       </p:sp>
@@ -264,10 +279,9 @@
           </a:lstStyle>
           <a:p>
             <a:r>
-              <a:rPr lang="en-US" smtClean="0"/>
+              <a:rPr lang="en-US"/>
               <a:t>Click to edit Master subtitle style</a:t>
             </a:r>
-            <a:endParaRPr lang="en-US"/>
           </a:p>
         </p:txBody>
       </p:sp>
@@ -288,7 +302,7 @@
           <a:p>
             <a:fld id="{5BCAD085-E8A6-8845-BD4E-CB4CCA059FC4}" type="datetimeFigureOut">
               <a:rPr lang="en-US" smtClean="0"/>
-              <a:t>1/27/13</a:t>
+              <a:t>7/2/2026</a:t>
             </a:fld>
             <a:endParaRPr lang="en-US"/>
           </a:p>
@@ -382,10 +396,9 @@
           <a:lstStyle/>
           <a:p>
             <a:r>
-              <a:rPr lang="en-US" smtClean="0"/>
+              <a:rPr lang="en-US"/>
               <a:t>Click to edit Master title style</a:t>
             </a:r>
-            <a:endParaRPr lang="en-US"/>
           </a:p>
         </p:txBody>
       </p:sp>
@@ -406,38 +419,37 @@
           <a:p>
             <a:pPr lvl="0"/>
             <a:r>
-              <a:rPr lang="en-US" smtClean="0"/>
+              <a:rPr lang="en-US"/>
               <a:t>Click to edit Master text styles</a:t>
             </a:r>
           </a:p>
           <a:p>
             <a:pPr lvl="1"/>
             <a:r>
-              <a:rPr lang="en-US" smtClean="0"/>
+              <a:rPr lang="en-US"/>
               <a:t>Second level</a:t>
             </a:r>
           </a:p>
           <a:p>
             <a:pPr lvl="2"/>
             <a:r>
-              <a:rPr lang="en-US" smtClean="0"/>
+              <a:rPr lang="en-US"/>
               <a:t>Third level</a:t>
             </a:r>
           </a:p>
           <a:p>
             <a:pPr lvl="3"/>
             <a:r>
-              <a:rPr lang="en-US" smtClean="0"/>
+              <a:rPr lang="en-US"/>
               <a:t>Fourth level</a:t>
             </a:r>
           </a:p>
           <a:p>
             <a:pPr lvl="4"/>
             <a:r>
-              <a:rPr lang="en-US" smtClean="0"/>
+              <a:rPr lang="en-US"/>
               <a:t>Fifth level</a:t>
             </a:r>
-            <a:endParaRPr lang="en-US"/>
           </a:p>
         </p:txBody>
       </p:sp>
@@ -458,7 +470,7 @@
           <a:p>
             <a:fld id="{5BCAD085-E8A6-8845-BD4E-CB4CCA059FC4}" type="datetimeFigureOut">
               <a:rPr lang="en-US" smtClean="0"/>
-              <a:t>1/27/13</a:t>
+              <a:t>7/2/2026</a:t>
             </a:fld>
             <a:endParaRPr lang="en-US"/>
           </a:p>
@@ -557,10 +569,9 @@
           <a:lstStyle/>
           <a:p>
             <a:r>
-              <a:rPr lang="en-US" smtClean="0"/>
+              <a:rPr lang="en-US"/>
               <a:t>Click to edit Master title style</a:t>
             </a:r>
-            <a:endParaRPr lang="en-US"/>
           </a:p>
         </p:txBody>
       </p:sp>
@@ -586,38 +597,37 @@
           <a:p>
             <a:pPr lvl="0"/>
             <a:r>
-              <a:rPr lang="en-US" smtClean="0"/>
+              <a:rPr lang="en-US"/>
               <a:t>Click to edit Master text styles</a:t>
             </a:r>
           </a:p>
           <a:p>
             <a:pPr lvl="1"/>
             <a:r>
-              <a:rPr lang="en-US" smtClean="0"/>
+              <a:rPr lang="en-US"/>
               <a:t>Second level</a:t>
             </a:r>
           </a:p>
           <a:p>
             <a:pPr lvl="2"/>
             <a:r>
-              <a:rPr lang="en-US" smtClean="0"/>
+              <a:rPr lang="en-US"/>
               <a:t>Third level</a:t>
             </a:r>
           </a:p>
           <a:p>
             <a:pPr lvl="3"/>
             <a:r>
-              <a:rPr lang="en-US" smtClean="0"/>
+              <a:rPr lang="en-US"/>
               <a:t>Fourth level</a:t>
             </a:r>
           </a:p>
           <a:p>
             <a:pPr lvl="4"/>
             <a:r>
-              <a:rPr lang="en-US" smtClean="0"/>
+              <a:rPr lang="en-US"/>
               <a:t>Fifth level</a:t>
             </a:r>
-            <a:endParaRPr lang="en-US"/>
           </a:p>
         </p:txBody>
       </p:sp>
@@ -638,7 +648,7 @@
           <a:p>
             <a:fld id="{5BCAD085-E8A6-8845-BD4E-CB4CCA059FC4}" type="datetimeFigureOut">
               <a:rPr lang="en-US" smtClean="0"/>
-              <a:t>1/27/13</a:t>
+              <a:t>7/2/2026</a:t>
             </a:fld>
             <a:endParaRPr lang="en-US"/>
           </a:p>
@@ -732,10 +742,9 @@
           <a:lstStyle/>
           <a:p>
             <a:r>
-              <a:rPr lang="en-US" smtClean="0"/>
+              <a:rPr lang="en-US"/>
               <a:t>Click to edit Master title style</a:t>
             </a:r>
-            <a:endParaRPr lang="en-US"/>
           </a:p>
         </p:txBody>
       </p:sp>
@@ -756,38 +765,37 @@
           <a:p>
             <a:pPr lvl="0"/>
             <a:r>
-              <a:rPr lang="en-US" smtClean="0"/>
+              <a:rPr lang="en-US"/>
               <a:t>Click to edit Master text styles</a:t>
             </a:r>
           </a:p>
           <a:p>
             <a:pPr lvl="1"/>
             <a:r>
-              <a:rPr lang="en-US" smtClean="0"/>
+              <a:rPr lang="en-US"/>
               <a:t>Second level</a:t>
             </a:r>
           </a:p>
           <a:p>
             <a:pPr lvl="2"/>
             <a:r>
-              <a:rPr lang="en-US" smtClean="0"/>
+              <a:rPr lang="en-US"/>
               <a:t>Third level</a:t>
             </a:r>
           </a:p>
           <a:p>
             <a:pPr lvl="3"/>
             <a:r>
-              <a:rPr lang="en-US" smtClean="0"/>
+              <a:rPr lang="en-US"/>
               <a:t>Fourth level</a:t>
             </a:r>
           </a:p>
           <a:p>
             <a:pPr lvl="4"/>
             <a:r>
-              <a:rPr lang="en-US" smtClean="0"/>
+              <a:rPr lang="en-US"/>
               <a:t>Fifth level</a:t>
             </a:r>
-            <a:endParaRPr lang="en-US"/>
           </a:p>
         </p:txBody>
       </p:sp>
@@ -808,7 +816,7 @@
           <a:p>
             <a:fld id="{5BCAD085-E8A6-8845-BD4E-CB4CCA059FC4}" type="datetimeFigureOut">
               <a:rPr lang="en-US" smtClean="0"/>
-              <a:t>1/27/13</a:t>
+              <a:t>7/2/2026</a:t>
             </a:fld>
             <a:endParaRPr lang="en-US"/>
           </a:p>
@@ -911,10 +919,9 @@
           </a:lstStyle>
           <a:p>
             <a:r>
-              <a:rPr lang="en-US" smtClean="0"/>
+              <a:rPr lang="en-US"/>
               <a:t>Click to edit Master title style</a:t>
             </a:r>
-            <a:endParaRPr lang="en-US"/>
           </a:p>
         </p:txBody>
       </p:sp>
@@ -1031,7 +1038,7 @@
           <a:p>
             <a:pPr lvl="0"/>
             <a:r>
-              <a:rPr lang="en-US" smtClean="0"/>
+              <a:rPr lang="en-US"/>
               <a:t>Click to edit Master text styles</a:t>
             </a:r>
           </a:p>
@@ -1054,7 +1061,7 @@
           <a:p>
             <a:fld id="{5BCAD085-E8A6-8845-BD4E-CB4CCA059FC4}" type="datetimeFigureOut">
               <a:rPr lang="en-US" smtClean="0"/>
-              <a:t>1/27/13</a:t>
+              <a:t>7/2/2026</a:t>
             </a:fld>
             <a:endParaRPr lang="en-US"/>
           </a:p>
@@ -1148,10 +1155,9 @@
           <a:lstStyle/>
           <a:p>
             <a:r>
-              <a:rPr lang="en-US" smtClean="0"/>
+              <a:rPr lang="en-US"/>
               <a:t>Click to edit Master title style</a:t>
             </a:r>
-            <a:endParaRPr lang="en-US"/>
           </a:p>
         </p:txBody>
       </p:sp>
@@ -1205,38 +1211,37 @@
           <a:p>
             <a:pPr lvl="0"/>
             <a:r>
-              <a:rPr lang="en-US" smtClean="0"/>
+              <a:rPr lang="en-US"/>
               <a:t>Click to edit Master text styles</a:t>
             </a:r>
           </a:p>
           <a:p>
             <a:pPr lvl="1"/>
             <a:r>
-              <a:rPr lang="en-US" smtClean="0"/>
+              <a:rPr lang="en-US"/>
               <a:t>Second level</a:t>
             </a:r>
           </a:p>
           <a:p>
             <a:pPr lvl="2"/>
             <a:r>
-              <a:rPr lang="en-US" smtClean="0"/>
+              <a:rPr lang="en-US"/>
               <a:t>Third level</a:t>
             </a:r>
           </a:p>
           <a:p>
             <a:pPr lvl="3"/>
             <a:r>
-              <a:rPr lang="en-US" smtClean="0"/>
+              <a:rPr lang="en-US"/>
               <a:t>Fourth level</a:t>
             </a:r>
           </a:p>
           <a:p>
             <a:pPr lvl="4"/>
             <a:r>
-              <a:rPr lang="en-US" smtClean="0"/>
+              <a:rPr lang="en-US"/>
               <a:t>Fifth level</a:t>
             </a:r>
-            <a:endParaRPr lang="en-US"/>
           </a:p>
         </p:txBody>
       </p:sp>
@@ -1290,38 +1295,37 @@
           <a:p>
             <a:pPr lvl="0"/>
             <a:r>
-              <a:rPr lang="en-US" smtClean="0"/>
+              <a:rPr lang="en-US"/>
               <a:t>Click to edit Master text styles</a:t>
             </a:r>
           </a:p>
           <a:p>
             <a:pPr lvl="1"/>
             <a:r>
-              <a:rPr lang="en-US" smtClean="0"/>
+              <a:rPr lang="en-US"/>
               <a:t>Second level</a:t>
             </a:r>
           </a:p>
           <a:p>
             <a:pPr lvl="2"/>
             <a:r>
-              <a:rPr lang="en-US" smtClean="0"/>
+              <a:rPr lang="en-US"/>
               <a:t>Third level</a:t>
             </a:r>
           </a:p>
           <a:p>
             <a:pPr lvl="3"/>
             <a:r>
-              <a:rPr lang="en-US" smtClean="0"/>
+              <a:rPr lang="en-US"/>
               <a:t>Fourth level</a:t>
             </a:r>
           </a:p>
           <a:p>
             <a:pPr lvl="4"/>
             <a:r>
-              <a:rPr lang="en-US" smtClean="0"/>
+              <a:rPr lang="en-US"/>
               <a:t>Fifth level</a:t>
             </a:r>
-            <a:endParaRPr lang="en-US"/>
           </a:p>
         </p:txBody>
       </p:sp>
@@ -1342,7 +1346,7 @@
           <a:p>
             <a:fld id="{5BCAD085-E8A6-8845-BD4E-CB4CCA059FC4}" type="datetimeFigureOut">
               <a:rPr lang="en-US" smtClean="0"/>
-              <a:t>1/27/13</a:t>
+              <a:t>7/2/2026</a:t>
             </a:fld>
             <a:endParaRPr lang="en-US"/>
           </a:p>
@@ -1440,10 +1444,9 @@
           </a:lstStyle>
           <a:p>
             <a:r>
-              <a:rPr lang="en-US" smtClean="0"/>
+              <a:rPr lang="en-US"/>
               <a:t>Click to edit Master title style</a:t>
             </a:r>
-            <a:endParaRPr lang="en-US"/>
           </a:p>
         </p:txBody>
       </p:sp>
@@ -1506,7 +1509,7 @@
           <a:p>
             <a:pPr lvl="0"/>
             <a:r>
-              <a:rPr lang="en-US" smtClean="0"/>
+              <a:rPr lang="en-US"/>
               <a:t>Click to edit Master text styles</a:t>
             </a:r>
           </a:p>
@@ -1562,38 +1565,37 @@
           <a:p>
             <a:pPr lvl="0"/>
             <a:r>
-              <a:rPr lang="en-US" smtClean="0"/>
+              <a:rPr lang="en-US"/>
               <a:t>Click to edit Master text styles</a:t>
             </a:r>
           </a:p>
           <a:p>
             <a:pPr lvl="1"/>
             <a:r>
-              <a:rPr lang="en-US" smtClean="0"/>
+              <a:rPr lang="en-US"/>
               <a:t>Second level</a:t>
             </a:r>
           </a:p>
           <a:p>
             <a:pPr lvl="2"/>
             <a:r>
-              <a:rPr lang="en-US" smtClean="0"/>
+              <a:rPr lang="en-US"/>
               <a:t>Third level</a:t>
             </a:r>
           </a:p>
           <a:p>
             <a:pPr lvl="3"/>
             <a:r>
-              <a:rPr lang="en-US" smtClean="0"/>
+              <a:rPr lang="en-US"/>
               <a:t>Fourth level</a:t>
             </a:r>
           </a:p>
           <a:p>
             <a:pPr lvl="4"/>
             <a:r>
-              <a:rPr lang="en-US" smtClean="0"/>
+              <a:rPr lang="en-US"/>
               <a:t>Fifth level</a:t>
             </a:r>
-            <a:endParaRPr lang="en-US"/>
           </a:p>
         </p:txBody>
       </p:sp>
@@ -1656,7 +1658,7 @@
           <a:p>
             <a:pPr lvl="0"/>
             <a:r>
-              <a:rPr lang="en-US" smtClean="0"/>
+              <a:rPr lang="en-US"/>
               <a:t>Click to edit Master text styles</a:t>
             </a:r>
           </a:p>
@@ -1712,38 +1714,37 @@
           <a:p>
             <a:pPr lvl="0"/>
             <a:r>
-              <a:rPr lang="en-US" smtClean="0"/>
+              <a:rPr lang="en-US"/>
               <a:t>Click to edit Master text styles</a:t>
             </a:r>
           </a:p>
           <a:p>
             <a:pPr lvl="1"/>
             <a:r>
-              <a:rPr lang="en-US" smtClean="0"/>
+              <a:rPr lang="en-US"/>
               <a:t>Second level</a:t>
             </a:r>
           </a:p>
           <a:p>
             <a:pPr lvl="2"/>
             <a:r>
-              <a:rPr lang="en-US" smtClean="0"/>
+              <a:rPr lang="en-US"/>
               <a:t>Third level</a:t>
             </a:r>
           </a:p>
           <a:p>
             <a:pPr lvl="3"/>
             <a:r>
-              <a:rPr lang="en-US" smtClean="0"/>
+              <a:rPr lang="en-US"/>
               <a:t>Fourth level</a:t>
             </a:r>
           </a:p>
           <a:p>
             <a:pPr lvl="4"/>
             <a:r>
-              <a:rPr lang="en-US" smtClean="0"/>
+              <a:rPr lang="en-US"/>
               <a:t>Fifth level</a:t>
             </a:r>
-            <a:endParaRPr lang="en-US"/>
           </a:p>
         </p:txBody>
       </p:sp>
@@ -1764,7 +1765,7 @@
           <a:p>
             <a:fld id="{5BCAD085-E8A6-8845-BD4E-CB4CCA059FC4}" type="datetimeFigureOut">
               <a:rPr lang="en-US" smtClean="0"/>
-              <a:t>1/27/13</a:t>
+              <a:t>7/2/2026</a:t>
             </a:fld>
             <a:endParaRPr lang="en-US"/>
           </a:p>
@@ -1858,10 +1859,9 @@
           <a:lstStyle/>
           <a:p>
             <a:r>
-              <a:rPr lang="en-US" smtClean="0"/>
+              <a:rPr lang="en-US"/>
               <a:t>Click to edit Master title style</a:t>
             </a:r>
-            <a:endParaRPr lang="en-US"/>
           </a:p>
         </p:txBody>
       </p:sp>
@@ -1882,7 +1882,7 @@
           <a:p>
             <a:fld id="{5BCAD085-E8A6-8845-BD4E-CB4CCA059FC4}" type="datetimeFigureOut">
               <a:rPr lang="en-US" smtClean="0"/>
-              <a:t>1/27/13</a:t>
+              <a:t>7/2/2026</a:t>
             </a:fld>
             <a:endParaRPr lang="en-US"/>
           </a:p>
@@ -1977,7 +1977,7 @@
           <a:p>
             <a:fld id="{5BCAD085-E8A6-8845-BD4E-CB4CCA059FC4}" type="datetimeFigureOut">
               <a:rPr lang="en-US" smtClean="0"/>
-              <a:t>1/27/13</a:t>
+              <a:t>7/2/2026</a:t>
             </a:fld>
             <a:endParaRPr lang="en-US"/>
           </a:p>
@@ -2080,10 +2080,9 @@
           </a:lstStyle>
           <a:p>
             <a:r>
-              <a:rPr lang="en-US" smtClean="0"/>
+              <a:rPr lang="en-US"/>
               <a:t>Click to edit Master title style</a:t>
             </a:r>
-            <a:endParaRPr lang="en-US"/>
           </a:p>
         </p:txBody>
       </p:sp>
@@ -2137,38 +2136,37 @@
           <a:p>
             <a:pPr lvl="0"/>
             <a:r>
-              <a:rPr lang="en-US" smtClean="0"/>
+              <a:rPr lang="en-US"/>
               <a:t>Click to edit Master text styles</a:t>
             </a:r>
           </a:p>
           <a:p>
             <a:pPr lvl="1"/>
             <a:r>
-              <a:rPr lang="en-US" smtClean="0"/>
+              <a:rPr lang="en-US"/>
               <a:t>Second level</a:t>
             </a:r>
           </a:p>
           <a:p>
             <a:pPr lvl="2"/>
             <a:r>
-              <a:rPr lang="en-US" smtClean="0"/>
+              <a:rPr lang="en-US"/>
               <a:t>Third level</a:t>
             </a:r>
           </a:p>
           <a:p>
             <a:pPr lvl="3"/>
             <a:r>
-              <a:rPr lang="en-US" smtClean="0"/>
+              <a:rPr lang="en-US"/>
               <a:t>Fourth level</a:t>
             </a:r>
           </a:p>
           <a:p>
             <a:pPr lvl="4"/>
             <a:r>
-              <a:rPr lang="en-US" smtClean="0"/>
+              <a:rPr lang="en-US"/>
               <a:t>Fifth level</a:t>
             </a:r>
-            <a:endParaRPr lang="en-US"/>
           </a:p>
         </p:txBody>
       </p:sp>
@@ -2231,7 +2229,7 @@
           <a:p>
             <a:pPr lvl="0"/>
             <a:r>
-              <a:rPr lang="en-US" smtClean="0"/>
+              <a:rPr lang="en-US"/>
               <a:t>Click to edit Master text styles</a:t>
             </a:r>
           </a:p>
@@ -2254,7 +2252,7 @@
           <a:p>
             <a:fld id="{5BCAD085-E8A6-8845-BD4E-CB4CCA059FC4}" type="datetimeFigureOut">
               <a:rPr lang="en-US" smtClean="0"/>
-              <a:t>1/27/13</a:t>
+              <a:t>7/2/2026</a:t>
             </a:fld>
             <a:endParaRPr lang="en-US"/>
           </a:p>
@@ -2357,10 +2355,9 @@
           </a:lstStyle>
           <a:p>
             <a:r>
-              <a:rPr lang="en-US" smtClean="0"/>
+              <a:rPr lang="en-US"/>
               <a:t>Click to edit Master title style</a:t>
             </a:r>
-            <a:endParaRPr lang="en-US"/>
           </a:p>
         </p:txBody>
       </p:sp>
@@ -2484,7 +2481,7 @@
           <a:p>
             <a:pPr lvl="0"/>
             <a:r>
-              <a:rPr lang="en-US" smtClean="0"/>
+              <a:rPr lang="en-US"/>
               <a:t>Click to edit Master text styles</a:t>
             </a:r>
           </a:p>
@@ -2507,7 +2504,7 @@
           <a:p>
             <a:fld id="{5BCAD085-E8A6-8845-BD4E-CB4CCA059FC4}" type="datetimeFigureOut">
               <a:rPr lang="en-US" smtClean="0"/>
-              <a:t>1/27/13</a:t>
+              <a:t>7/2/2026</a:t>
             </a:fld>
             <a:endParaRPr lang="en-US"/>
           </a:p>
@@ -2616,10 +2613,9 @@
           <a:lstStyle/>
           <a:p>
             <a:r>
-              <a:rPr lang="en-US" smtClean="0"/>
+              <a:rPr lang="en-US"/>
               <a:t>Click to edit Master title style</a:t>
             </a:r>
-            <a:endParaRPr lang="en-US"/>
           </a:p>
         </p:txBody>
       </p:sp>
@@ -2650,38 +2646,37 @@
           <a:p>
             <a:pPr lvl="0"/>
             <a:r>
-              <a:rPr lang="en-US" smtClean="0"/>
+              <a:rPr lang="en-US"/>
               <a:t>Click to edit Master text styles</a:t>
             </a:r>
           </a:p>
           <a:p>
             <a:pPr lvl="1"/>
             <a:r>
-              <a:rPr lang="en-US" smtClean="0"/>
+              <a:rPr lang="en-US"/>
               <a:t>Second level</a:t>
             </a:r>
           </a:p>
           <a:p>
             <a:pPr lvl="2"/>
             <a:r>
-              <a:rPr lang="en-US" smtClean="0"/>
+              <a:rPr lang="en-US"/>
               <a:t>Third level</a:t>
             </a:r>
           </a:p>
           <a:p>
             <a:pPr lvl="3"/>
             <a:r>
-              <a:rPr lang="en-US" smtClean="0"/>
+              <a:rPr lang="en-US"/>
               <a:t>Fourth level</a:t>
             </a:r>
           </a:p>
           <a:p>
             <a:pPr lvl="4"/>
             <a:r>
-              <a:rPr lang="en-US" smtClean="0"/>
+              <a:rPr lang="en-US"/>
               <a:t>Fifth level</a:t>
             </a:r>
-            <a:endParaRPr lang="en-US"/>
           </a:p>
         </p:txBody>
       </p:sp>
@@ -2720,7 +2715,7 @@
           <a:p>
             <a:fld id="{5BCAD085-E8A6-8845-BD4E-CB4CCA059FC4}" type="datetimeFigureOut">
               <a:rPr lang="en-US" smtClean="0"/>
-              <a:t>1/27/13</a:t>
+              <a:t>7/2/2026</a:t>
             </a:fld>
             <a:endParaRPr lang="en-US"/>
           </a:p>
@@ -3079,7 +3074,7 @@
 </file>
 
 <file path=ppt/slides/slide1.xml><?xml version="1.0" encoding="utf-8"?>
-<p:sld xmlns:a="http://schemas.openxmlformats.org/drawingml/2006/main" xmlns:p="http://schemas.openxmlformats.org/presentationml/2006/main" xmlns:r="http://schemas.openxmlformats.org/officeDocument/2006/relationships">
+<p:sld xmlns:a="http://schemas.openxmlformats.org/drawingml/2006/main" xmlns:r="http://schemas.openxmlformats.org/officeDocument/2006/relationships" xmlns:p="http://schemas.openxmlformats.org/presentationml/2006/main">
   <p:cSld>
     <p:spTree>
       <p:nvGrpSpPr>
@@ -3087,7 +3082,14 @@
         <p:cNvGrpSpPr/>
         <p:nvPr/>
       </p:nvGrpSpPr>
-      <p:grpSpPr/>
+      <p:grpSpPr>
+        <a:xfrm>
+          <a:off x="0" y="0"/>
+          <a:ext cx="0" cy="0"/>
+          <a:chOff x="0" y="0"/>
+          <a:chExt cx="0" cy="0"/>
+        </a:xfrm>
+      </p:grpSpPr>
       <p:sp>
         <p:nvSpPr>
           <p:cNvPr id="2" name="Rectangle 1"/>
@@ -3096,7 +3098,7 @@
         </p:nvSpPr>
         <p:spPr>
           <a:xfrm>
-            <a:off x="0" y="0"/>
+            <a:off x="0" y="-100978"/>
             <a:ext cx="30275784" cy="42803064"/>
           </a:xfrm>
           <a:prstGeom prst="rect">
@@ -3129,19 +3131,26 @@
           <a:lstStyle/>
           <a:p>
             <a:pPr algn="ctr"/>
-          </a:p>
-        </p:txBody>
-      </p:sp>
-      <p:sp>
-        <p:nvSpPr>
-          <p:cNvPr id="3" name="Rounded Rectangle 2"/>
+            <a:endParaRPr/>
+          </a:p>
+        </p:txBody>
+      </p:sp>
+      <p:sp>
+        <p:nvSpPr>
+          <p:cNvPr id="59" name="Rounded Rectangle 42">
+            <a:extLst>
+              <a:ext uri="{FF2B5EF4-FFF2-40B4-BE49-F238E27FC236}">
+                <a16:creationId xmlns:a16="http://schemas.microsoft.com/office/drawing/2014/main" id="{A1800966-4A8B-A9B2-C98A-C2022DD41287}"/>
+              </a:ext>
+            </a:extLst>
+          </p:cNvPr>
           <p:cNvSpPr/>
           <p:nvPr/>
         </p:nvSpPr>
         <p:spPr>
           <a:xfrm>
-            <a:off x="274320" y="365760"/>
-            <a:ext cx="29727144" cy="4023360"/>
+            <a:off x="22364699" y="38643243"/>
+            <a:ext cx="7271005" cy="3840480"/>
           </a:xfrm>
           <a:prstGeom prst="roundRect">
             <a:avLst>
@@ -3149,10 +3158,12 @@
             </a:avLst>
           </a:prstGeom>
           <a:solidFill>
-            <a:srgbClr val="22406E"/>
+            <a:srgbClr val="FFFFFF"/>
           </a:solidFill>
-          <a:ln>
-            <a:noFill/>
+          <a:ln w="12700">
+            <a:solidFill>
+              <a:srgbClr val="C7CED8"/>
+            </a:solidFill>
           </a:ln>
           <a:effectLst/>
         </p:spPr>
@@ -3175,99 +3186,37 @@
           <a:lstStyle/>
           <a:p>
             <a:pPr algn="ctr"/>
-          </a:p>
-        </p:txBody>
-      </p:sp>
-      <p:sp>
-        <p:nvSpPr>
-          <p:cNvPr id="4" name="TextBox 3"/>
-          <p:cNvSpPr txBox="1"/>
-          <p:nvPr/>
-        </p:nvSpPr>
-        <p:spPr>
-          <a:xfrm>
-            <a:off x="548640" y="457200"/>
-            <a:ext cx="29169360" cy="3840480"/>
-          </a:xfrm>
-          <a:prstGeom prst="rect">
-            <a:avLst/>
-          </a:prstGeom>
-          <a:noFill/>
-        </p:spPr>
-        <p:txBody>
-          <a:bodyPr wrap="square" anchor="ctr" lIns="109728" rIns="109728" tIns="54864" bIns="54864">
-            <a:spAutoFit/>
-          </a:bodyPr>
-          <a:lstStyle/>
-          <a:p>
-            <a:pPr algn="ctr">
-              <a:spcAft>
-                <a:spcPts val="400"/>
-              </a:spcAft>
-            </a:pPr>
-            <a:r>
-              <a:rPr sz="4600" b="1">
-                <a:solidFill>
-                  <a:srgbClr val="FFFFFF"/>
-                </a:solidFill>
-                <a:latin typeface="Times New Roman"/>
-              </a:rPr>
-              <a:t>VPL: A Novel Cost Model for Earth and Mars-Orbit Navigation and Communication Constellations</a:t>
-            </a:r>
-          </a:p>
-          <a:p>
-            <a:pPr algn="ctr">
-              <a:spcAft>
-                <a:spcPts val="400"/>
-              </a:spcAft>
-            </a:pPr>
-            <a:r>
-              <a:rPr sz="2800" b="0">
-                <a:solidFill>
-                  <a:srgbClr val="FFFFFF"/>
-                </a:solidFill>
-                <a:latin typeface="Times New Roman"/>
-              </a:rPr>
-              <a:t>M. Cholevas (TU München)   •   G. Vardanikas (TU Delft)</a:t>
-            </a:r>
-          </a:p>
-          <a:p>
-            <a:pPr algn="ctr">
-              <a:spcAft>
-                <a:spcPts val="400"/>
-              </a:spcAft>
-            </a:pPr>
-            <a:r>
-              <a:rPr sz="2400" b="0">
-                <a:solidFill>
-                  <a:srgbClr val="FFFFFF"/>
-                </a:solidFill>
-                <a:latin typeface="Times New Roman"/>
-              </a:rPr>
-              <a:t>ESA/CNES Cost Engineering Conference 2026</a:t>
-            </a:r>
-          </a:p>
-        </p:txBody>
-      </p:sp>
-      <p:sp>
-        <p:nvSpPr>
-          <p:cNvPr id="5" name="Rounded Rectangle 4"/>
+            <a:endParaRPr/>
+          </a:p>
+        </p:txBody>
+      </p:sp>
+      <p:sp>
+        <p:nvSpPr>
+          <p:cNvPr id="3" name="Rounded Rectangle 2"/>
           <p:cNvSpPr/>
           <p:nvPr/>
         </p:nvSpPr>
         <p:spPr>
           <a:xfrm>
-            <a:off x="640080" y="4754880"/>
-            <a:ext cx="8408730" cy="914400"/>
+            <a:off x="274320" y="365760"/>
+            <a:ext cx="29727144" cy="4023360"/>
           </a:xfrm>
           <a:prstGeom prst="roundRect">
             <a:avLst>
               <a:gd name="adj" fmla="val 4000"/>
             </a:avLst>
           </a:prstGeom>
-          <a:solidFill>
-            <a:srgbClr val="22406E"/>
-          </a:solidFill>
+          <a:gradFill>
+            <a:gsLst>
+              <a:gs pos="0">
+                <a:srgbClr val="0D5EAF"/>
+              </a:gs>
+              <a:gs pos="100000">
+                <a:srgbClr val="0C549C"/>
+              </a:gs>
+            </a:gsLst>
+            <a:lin ang="16200000" scaled="0"/>
+          </a:gradFill>
           <a:ln>
             <a:noFill/>
           </a:ln>
@@ -3292,19 +3241,20 @@
           <a:lstStyle/>
           <a:p>
             <a:pPr algn="ctr"/>
-          </a:p>
-        </p:txBody>
-      </p:sp>
-      <p:sp>
-        <p:nvSpPr>
-          <p:cNvPr id="6" name="TextBox 5"/>
+            <a:endParaRPr/>
+          </a:p>
+        </p:txBody>
+      </p:sp>
+      <p:sp>
+        <p:nvSpPr>
+          <p:cNvPr id="4" name="TextBox 3"/>
           <p:cNvSpPr txBox="1"/>
           <p:nvPr/>
         </p:nvSpPr>
         <p:spPr>
           <a:xfrm>
-            <a:off x="640080" y="4754880"/>
-            <a:ext cx="8408730" cy="914400"/>
+            <a:off x="548640" y="454867"/>
+            <a:ext cx="25571923" cy="3845155"/>
           </a:xfrm>
           <a:prstGeom prst="rect">
             <a:avLst/>
@@ -3312,18 +3262,172 @@
           <a:noFill/>
         </p:spPr>
         <p:txBody>
-          <a:bodyPr wrap="square" anchor="ctr" lIns="109728" rIns="109728" tIns="54864" bIns="54864">
+          <a:bodyPr wrap="square" lIns="109728" tIns="54864" rIns="109728" bIns="54864" anchor="ctr">
             <a:spAutoFit/>
           </a:bodyPr>
           <a:lstStyle/>
           <a:p>
-            <a:pPr algn="l">
+            <a:pPr algn="ctr">
               <a:spcAft>
                 <a:spcPts val="400"/>
               </a:spcAft>
             </a:pPr>
             <a:r>
-              <a:rPr sz="3000" b="1">
+              <a:rPr sz="7200" b="1" dirty="0">
+                <a:solidFill>
+                  <a:srgbClr val="FFFFFF"/>
+                </a:solidFill>
+                <a:latin typeface="Times New Roman"/>
+              </a:rPr>
+              <a:t>VPL: A Novel Cost Model for Earth and Mars-Orbit Navigation and Communication Constellations</a:t>
+            </a:r>
+          </a:p>
+          <a:p>
+            <a:pPr algn="ctr">
+              <a:spcAft>
+                <a:spcPts val="400"/>
+              </a:spcAft>
+            </a:pPr>
+            <a:r>
+              <a:rPr sz="4800" b="0" dirty="0">
+                <a:solidFill>
+                  <a:srgbClr val="FFFFFF"/>
+                </a:solidFill>
+                <a:latin typeface="Times New Roman"/>
+              </a:rPr>
+              <a:t>M. Cholevas (TU München)   •   G. </a:t>
+            </a:r>
+            <a:r>
+              <a:rPr sz="4800" b="0" dirty="0" err="1">
+                <a:solidFill>
+                  <a:srgbClr val="FFFFFF"/>
+                </a:solidFill>
+                <a:latin typeface="Times New Roman"/>
+              </a:rPr>
+              <a:t>Vardanikas</a:t>
+            </a:r>
+            <a:r>
+              <a:rPr sz="4800" b="0" dirty="0">
+                <a:solidFill>
+                  <a:srgbClr val="FFFFFF"/>
+                </a:solidFill>
+                <a:latin typeface="Times New Roman"/>
+              </a:rPr>
+              <a:t> (TU Delft)</a:t>
+            </a:r>
+          </a:p>
+          <a:p>
+            <a:pPr algn="ctr">
+              <a:spcAft>
+                <a:spcPts val="400"/>
+              </a:spcAft>
+            </a:pPr>
+            <a:r>
+              <a:rPr sz="4400" b="0" dirty="0">
+                <a:solidFill>
+                  <a:srgbClr val="FFFFFF"/>
+                </a:solidFill>
+                <a:latin typeface="Times New Roman"/>
+              </a:rPr>
+              <a:t>ESA/CNES Cost Engineering Conference 2026</a:t>
+            </a:r>
+          </a:p>
+        </p:txBody>
+      </p:sp>
+      <p:sp>
+        <p:nvSpPr>
+          <p:cNvPr id="5" name="Rounded Rectangle 4"/>
+          <p:cNvSpPr/>
+          <p:nvPr/>
+        </p:nvSpPr>
+        <p:spPr>
+          <a:xfrm>
+            <a:off x="640080" y="4754880"/>
+            <a:ext cx="8408730" cy="914400"/>
+          </a:xfrm>
+          <a:prstGeom prst="roundRect">
+            <a:avLst>
+              <a:gd name="adj" fmla="val 4000"/>
+            </a:avLst>
+          </a:prstGeom>
+          <a:gradFill>
+            <a:gsLst>
+              <a:gs pos="0">
+                <a:srgbClr val="0D5EAF"/>
+              </a:gs>
+              <a:gs pos="100000">
+                <a:srgbClr val="0C549C"/>
+              </a:gs>
+            </a:gsLst>
+            <a:lin ang="5400000" scaled="0"/>
+          </a:gradFill>
+          <a:ln>
+            <a:noFill/>
+          </a:ln>
+          <a:effectLst/>
+        </p:spPr>
+        <p:style>
+          <a:lnRef idx="1">
+            <a:schemeClr val="accent1"/>
+          </a:lnRef>
+          <a:fillRef idx="3">
+            <a:schemeClr val="accent1"/>
+          </a:fillRef>
+          <a:effectRef idx="2">
+            <a:schemeClr val="accent1"/>
+          </a:effectRef>
+          <a:fontRef idx="minor">
+            <a:schemeClr val="lt1"/>
+          </a:fontRef>
+        </p:style>
+        <p:txBody>
+          <a:bodyPr rtlCol="0" anchor="ctr"/>
+          <a:lstStyle/>
+          <a:p>
+            <a:pPr algn="ctr"/>
+            <a:endParaRPr/>
+          </a:p>
+        </p:txBody>
+      </p:sp>
+      <p:sp>
+        <p:nvSpPr>
+          <p:cNvPr id="6" name="TextBox 5"/>
+          <p:cNvSpPr txBox="1"/>
+          <p:nvPr/>
+        </p:nvSpPr>
+        <p:spPr>
+          <a:xfrm>
+            <a:off x="640080" y="4695018"/>
+            <a:ext cx="8408730" cy="1034129"/>
+          </a:xfrm>
+          <a:prstGeom prst="rect">
+            <a:avLst/>
+          </a:prstGeom>
+          <a:gradFill>
+            <a:gsLst>
+              <a:gs pos="0">
+                <a:srgbClr val="0D5EAF"/>
+              </a:gs>
+              <a:gs pos="100000">
+                <a:srgbClr val="0C549C"/>
+              </a:gs>
+            </a:gsLst>
+            <a:lin ang="16200000" scaled="0"/>
+          </a:gradFill>
+        </p:spPr>
+        <p:txBody>
+          <a:bodyPr wrap="square" lIns="109728" tIns="54864" rIns="109728" bIns="54864" anchor="ctr">
+            <a:spAutoFit/>
+          </a:bodyPr>
+          <a:lstStyle/>
+          <a:p>
+            <a:pPr algn="ctr">
+              <a:spcAft>
+                <a:spcPts val="400"/>
+              </a:spcAft>
+            </a:pPr>
+            <a:r>
+              <a:rPr sz="6000" b="1">
                 <a:solidFill>
                   <a:srgbClr val="FFFFFF"/>
                 </a:solidFill>
@@ -3379,6 +3483,7 @@
           <a:lstStyle/>
           <a:p>
             <a:pPr algn="ctr"/>
+            <a:endParaRPr/>
           </a:p>
         </p:txBody>
       </p:sp>
@@ -3391,7 +3496,7 @@
         <p:spPr>
           <a:xfrm>
             <a:off x="731519" y="5897880"/>
-            <a:ext cx="8225850" cy="4937759"/>
+            <a:ext cx="8225850" cy="3434786"/>
           </a:xfrm>
           <a:prstGeom prst="rect">
             <a:avLst/>
@@ -3399,7 +3504,7 @@
           <a:noFill/>
         </p:spPr>
         <p:txBody>
-          <a:bodyPr wrap="square" anchor="t" lIns="109728" rIns="109728" tIns="54864" bIns="54864">
+          <a:bodyPr wrap="square" lIns="109728" tIns="54864" rIns="109728" bIns="54864" anchor="t">
             <a:spAutoFit/>
           </a:bodyPr>
           <a:lstStyle/>
@@ -3410,25 +3515,61 @@
               </a:spcAft>
             </a:pPr>
             <a:r>
-              <a:rPr sz="2200" b="0">
+              <a:rPr sz="3600" b="0" dirty="0">
                 <a:solidFill>
                   <a:srgbClr val="1B2733"/>
                 </a:solidFill>
                 <a:latin typeface="Times New Roman"/>
               </a:rPr>
-              <a:t>Limited public unit-cost data for navigation and communication constellations. Legacy models (SMAD USCM8, QuickCost) rest on data up to the early 2000s. We build a cost model on </a:t>
-            </a:r>
-            <a:r>
-              <a:rPr sz="2200" b="1">
+              <a:t>Limited public unit-cost data for navigation and communication constellations. Legacy models (SMAD USCM8, </a:t>
+            </a:r>
+            <a:r>
+              <a:rPr sz="3600" b="0" dirty="0" err="1">
                 <a:solidFill>
                   <a:srgbClr val="1B2733"/>
                 </a:solidFill>
                 <a:latin typeface="Times New Roman"/>
               </a:rPr>
-              <a:t>25 systems</a:t>
-            </a:r>
-            <a:r>
-              <a:rPr sz="2200" b="0">
+              <a:t>QuickCost</a:t>
+            </a:r>
+            <a:r>
+              <a:rPr sz="3600" b="0" dirty="0">
+                <a:solidFill>
+                  <a:srgbClr val="1B2733"/>
+                </a:solidFill>
+                <a:latin typeface="Times New Roman"/>
+              </a:rPr>
+              <a:t>) rest on data up to the early 2000s. We build a cost model on </a:t>
+            </a:r>
+            <a:r>
+              <a:rPr sz="3600" b="1" dirty="0">
+                <a:solidFill>
+                  <a:srgbClr val="1B2733"/>
+                </a:solidFill>
+                <a:latin typeface="Times New Roman"/>
+              </a:rPr>
+              <a:t>2</a:t>
+            </a:r>
+            <a:r>
+              <a:rPr lang="de-DE" sz="3600" b="1" dirty="0">
+                <a:solidFill>
+                  <a:srgbClr val="1B2733"/>
+                </a:solidFill>
+                <a:latin typeface="Times New Roman"/>
+              </a:rPr>
+              <a:t>5</a:t>
+            </a:r>
+            <a:r>
+              <a:rPr sz="3600" b="1" dirty="0">
+                <a:solidFill>
+                  <a:srgbClr val="1B2733"/>
+                </a:solidFill>
+                <a:latin typeface="Times New Roman"/>
+              </a:rPr>
+              <a:t> systems</a:t>
+            </a:r>
+            <a:r>
+              <a:rPr sz="3600" b="0" dirty="0">
                 <a:solidFill>
                   <a:srgbClr val="1B2733"/>
                 </a:solidFill>
@@ -3455,9 +3596,17 @@
               <a:gd name="adj" fmla="val 4000"/>
             </a:avLst>
           </a:prstGeom>
-          <a:solidFill>
-            <a:srgbClr val="22406E"/>
-          </a:solidFill>
+          <a:gradFill>
+            <a:gsLst>
+              <a:gs pos="0">
+                <a:srgbClr val="0D5EAF"/>
+              </a:gs>
+              <a:gs pos="100000">
+                <a:srgbClr val="0C549C"/>
+              </a:gs>
+            </a:gsLst>
+            <a:lin ang="5400000" scaled="0"/>
+          </a:gradFill>
           <a:ln>
             <a:noFill/>
           </a:ln>
@@ -3482,6 +3631,7 @@
           <a:lstStyle/>
           <a:p>
             <a:pPr algn="ctr"/>
+            <a:endParaRPr/>
           </a:p>
         </p:txBody>
       </p:sp>
@@ -3493,27 +3643,37 @@
         </p:nvSpPr>
         <p:spPr>
           <a:xfrm>
-            <a:off x="9338767" y="4754880"/>
-            <a:ext cx="11598249" cy="914400"/>
+            <a:off x="9338767" y="4695018"/>
+            <a:ext cx="11598249" cy="1034129"/>
           </a:xfrm>
           <a:prstGeom prst="rect">
             <a:avLst/>
           </a:prstGeom>
-          <a:noFill/>
-        </p:spPr>
-        <p:txBody>
-          <a:bodyPr wrap="square" anchor="ctr" lIns="109728" rIns="109728" tIns="54864" bIns="54864">
+          <a:gradFill>
+            <a:gsLst>
+              <a:gs pos="0">
+                <a:srgbClr val="0D5EAF"/>
+              </a:gs>
+              <a:gs pos="100000">
+                <a:srgbClr val="0C549C"/>
+              </a:gs>
+            </a:gsLst>
+            <a:lin ang="16200000" scaled="0"/>
+          </a:gradFill>
+        </p:spPr>
+        <p:txBody>
+          <a:bodyPr wrap="square" lIns="109728" tIns="54864" rIns="109728" bIns="54864" anchor="ctr">
             <a:spAutoFit/>
           </a:bodyPr>
           <a:lstStyle/>
           <a:p>
-            <a:pPr algn="l">
+            <a:pPr algn="ctr">
               <a:spcAft>
                 <a:spcPts val="400"/>
               </a:spcAft>
             </a:pPr>
             <a:r>
-              <a:rPr sz="3000" b="1">
+              <a:rPr sz="6000" b="1">
                 <a:solidFill>
                   <a:srgbClr val="FFFFFF"/>
                 </a:solidFill>
@@ -3569,128 +3729,489 @@
           <a:lstStyle/>
           <a:p>
             <a:pPr algn="ctr"/>
-          </a:p>
-        </p:txBody>
-      </p:sp>
-      <p:sp>
-        <p:nvSpPr>
-          <p:cNvPr id="12" name="TextBox 11"/>
-          <p:cNvSpPr txBox="1"/>
-          <p:nvPr/>
-        </p:nvSpPr>
-        <p:spPr>
-          <a:xfrm>
-            <a:off x="9521647" y="5943600"/>
-            <a:ext cx="11232489" cy="4846320"/>
-          </a:xfrm>
-          <a:prstGeom prst="rect">
-            <a:avLst/>
-          </a:prstGeom>
-          <a:noFill/>
-        </p:spPr>
-        <p:txBody>
-          <a:bodyPr wrap="square" anchor="t" lIns="109728" rIns="109728" tIns="54864" bIns="54864">
-            <a:spAutoFit/>
-          </a:bodyPr>
-          <a:lstStyle/>
-          <a:p>
-            <a:pPr algn="l">
-              <a:spcAft>
-                <a:spcPts val="400"/>
-              </a:spcAft>
-            </a:pPr>
-            <a:r>
-              <a:rPr sz="2800" b="1">
-                <a:solidFill>
-                  <a:srgbClr val="1B2733"/>
-                </a:solidFill>
-                <a:latin typeface="Times New Roman"/>
-              </a:rPr>
-              <a:t>TOTAL(M,N) = F·g·[ DEV(M) + PFM(M)·N^LRE ]</a:t>
-            </a:r>
-          </a:p>
-          <a:p>
-            <a:pPr algn="l">
-              <a:spcAft>
-                <a:spcPts val="400"/>
-              </a:spcAft>
-            </a:pPr>
-            <a:r>
-              <a:rPr sz="2400" b="0">
-                <a:solidFill>
-                  <a:srgbClr val="1B2733"/>
-                </a:solidFill>
-                <a:latin typeface="Times New Roman"/>
-              </a:rPr>
-              <a:t>DEV(M) = 5.99·M^0.613      PFM(M) = 0.219·M^0.828</a:t>
-            </a:r>
-          </a:p>
-          <a:p>
-            <a:pPr algn="l">
-              <a:spcAft>
-                <a:spcPts val="400"/>
-              </a:spcAft>
-            </a:pPr>
-            <a:r>
-              <a:rPr sz="2200" b="0">
-                <a:solidFill>
-                  <a:srgbClr val="1B2733"/>
-                </a:solidFill>
-                <a:latin typeface="Times New Roman"/>
-              </a:rPr>
-              <a:t>M = platform mass [kg],  N = units,  cost in FY2025 €M.</a:t>
-            </a:r>
-          </a:p>
-          <a:p>
-            <a:pPr algn="l">
-              <a:spcAft>
-                <a:spcPts val="400"/>
-              </a:spcAft>
-            </a:pPr>
-            <a:r>
-              <a:rPr sz="2200" b="0">
-                <a:solidFill>
-                  <a:srgbClr val="1B2733"/>
-                </a:solidFill>
-                <a:latin typeface="Times New Roman"/>
-              </a:rPr>
-              <a:t>LRE = 1 + ln(0.9)/ln(2) = 0.848</a:t>
-            </a:r>
-          </a:p>
-          <a:p>
-            <a:pPr algn="l">
-              <a:spcAft>
-                <a:spcPts val="400"/>
-              </a:spcAft>
-            </a:pPr>
-            <a:r>
-              <a:rPr sz="2200" b="0">
-                <a:solidFill>
-                  <a:srgbClr val="1B2733"/>
-                </a:solidFill>
-                <a:latin typeface="Times New Roman"/>
-              </a:rPr>
-              <a:t>g = 1 traditional, 0.120 New-Space.   F = 1 Earth, 1.14 Mars.</a:t>
-            </a:r>
-          </a:p>
-          <a:p>
-            <a:pPr algn="l">
-              <a:spcAft>
-                <a:spcPts val="400"/>
-              </a:spcAft>
-            </a:pPr>
-            <a:r>
-              <a:rPr sz="2200" b="1">
-                <a:solidFill>
-                  <a:srgbClr val="1B2733"/>
-                </a:solidFill>
-                <a:latin typeface="Times New Roman"/>
-              </a:rPr>
-              <a:t>Plug in M and N → programme cost.</a:t>
-            </a:r>
-          </a:p>
-        </p:txBody>
-      </p:sp>
+            <a:endParaRPr/>
+          </a:p>
+        </p:txBody>
+      </p:sp>
+      <mc:AlternateContent xmlns:mc="http://schemas.openxmlformats.org/markup-compatibility/2006" xmlns:a14="http://schemas.microsoft.com/office/drawing/2010/main">
+        <mc:Choice Requires="a14">
+          <p:sp>
+            <p:nvSpPr>
+              <p:cNvPr id="12" name="TextBox 11"/>
+              <p:cNvSpPr txBox="1"/>
+              <p:nvPr/>
+            </p:nvSpPr>
+            <p:spPr>
+              <a:xfrm>
+                <a:off x="9521647" y="5943600"/>
+                <a:ext cx="11232489" cy="5035546"/>
+              </a:xfrm>
+              <a:prstGeom prst="rect">
+                <a:avLst/>
+              </a:prstGeom>
+              <a:noFill/>
+            </p:spPr>
+            <p:txBody>
+              <a:bodyPr wrap="square" lIns="109728" tIns="54864" rIns="109728" bIns="54864" anchor="t">
+                <a:spAutoFit/>
+              </a:bodyPr>
+              <a:lstStyle/>
+              <a:p>
+                <a:pPr algn="l">
+                  <a:spcAft>
+                    <a:spcPts val="400"/>
+                  </a:spcAft>
+                </a:pPr>
+                <a14:m>
+                  <m:oMathPara xmlns:m="http://schemas.openxmlformats.org/officeDocument/2006/math">
+                    <m:oMathParaPr>
+                      <m:jc m:val="left"/>
+                    </m:oMathParaPr>
+                    <m:oMath xmlns:m="http://schemas.openxmlformats.org/officeDocument/2006/math">
+                      <m:r>
+                        <a:rPr lang="en-US" sz="3600" b="1" i="1" dirty="0" smtClean="0">
+                          <a:solidFill>
+                            <a:srgbClr val="1B2733"/>
+                          </a:solidFill>
+                          <a:latin typeface="Cambria Math" panose="02040503050406030204" pitchFamily="18" charset="0"/>
+                        </a:rPr>
+                        <m:t>𝑪𝑶𝑺𝑻</m:t>
+                      </m:r>
+                      <m:r>
+                        <a:rPr lang="en-US" sz="3600" b="1" i="1" dirty="0" smtClean="0">
+                          <a:solidFill>
+                            <a:srgbClr val="1B2733"/>
+                          </a:solidFill>
+                          <a:latin typeface="Cambria Math" panose="02040503050406030204" pitchFamily="18" charset="0"/>
+                        </a:rPr>
+                        <m:t>(</m:t>
+                      </m:r>
+                      <m:r>
+                        <a:rPr lang="en-US" sz="3600" b="1" i="1" dirty="0" smtClean="0">
+                          <a:solidFill>
+                            <a:srgbClr val="1B2733"/>
+                          </a:solidFill>
+                          <a:latin typeface="Cambria Math" panose="02040503050406030204" pitchFamily="18" charset="0"/>
+                        </a:rPr>
+                        <m:t>𝑴</m:t>
+                      </m:r>
+                      <m:r>
+                        <a:rPr lang="en-US" sz="3600" b="1" i="1" dirty="0" smtClean="0">
+                          <a:solidFill>
+                            <a:srgbClr val="1B2733"/>
+                          </a:solidFill>
+                          <a:latin typeface="Cambria Math" panose="02040503050406030204" pitchFamily="18" charset="0"/>
+                        </a:rPr>
+                        <m:t>,</m:t>
+                      </m:r>
+                      <m:r>
+                        <a:rPr lang="en-US" sz="3600" b="1" i="1" dirty="0" smtClean="0">
+                          <a:solidFill>
+                            <a:srgbClr val="1B2733"/>
+                          </a:solidFill>
+                          <a:latin typeface="Cambria Math" panose="02040503050406030204" pitchFamily="18" charset="0"/>
+                        </a:rPr>
+                        <m:t>𝑵</m:t>
+                      </m:r>
+                      <m:r>
+                        <a:rPr lang="en-US" sz="3600" b="1" i="1" dirty="0" smtClean="0">
+                          <a:solidFill>
+                            <a:srgbClr val="1B2733"/>
+                          </a:solidFill>
+                          <a:latin typeface="Cambria Math" panose="02040503050406030204" pitchFamily="18" charset="0"/>
+                        </a:rPr>
+                        <m:t>) = </m:t>
+                      </m:r>
+                      <m:r>
+                        <a:rPr lang="en-US" sz="3600" b="1" i="1" dirty="0" err="1">
+                          <a:solidFill>
+                            <a:srgbClr val="1B2733"/>
+                          </a:solidFill>
+                          <a:latin typeface="Cambria Math" panose="02040503050406030204" pitchFamily="18" charset="0"/>
+                        </a:rPr>
+                        <m:t>𝑭</m:t>
+                      </m:r>
+                      <m:r>
+                        <a:rPr lang="en-US" sz="3600" b="1" i="1" dirty="0" err="1">
+                          <a:solidFill>
+                            <a:srgbClr val="1B2733"/>
+                          </a:solidFill>
+                          <a:latin typeface="Cambria Math" panose="02040503050406030204" pitchFamily="18" charset="0"/>
+                        </a:rPr>
+                        <m:t>·</m:t>
+                      </m:r>
+                      <m:r>
+                        <a:rPr lang="en-US" sz="3600" b="1" i="1" dirty="0" err="1">
+                          <a:solidFill>
+                            <a:srgbClr val="1B2733"/>
+                          </a:solidFill>
+                          <a:latin typeface="Cambria Math" panose="02040503050406030204" pitchFamily="18" charset="0"/>
+                        </a:rPr>
+                        <m:t>𝒈</m:t>
+                      </m:r>
+                      <m:r>
+                        <a:rPr lang="en-US" sz="3600" b="1" i="1" dirty="0">
+                          <a:solidFill>
+                            <a:srgbClr val="1B2733"/>
+                          </a:solidFill>
+                          <a:latin typeface="Cambria Math" panose="02040503050406030204" pitchFamily="18" charset="0"/>
+                        </a:rPr>
+                        <m:t>·[ </m:t>
+                      </m:r>
+                      <m:r>
+                        <a:rPr lang="en-US" sz="3600" b="1" i="1" dirty="0">
+                          <a:solidFill>
+                            <a:srgbClr val="1B2733"/>
+                          </a:solidFill>
+                          <a:latin typeface="Cambria Math" panose="02040503050406030204" pitchFamily="18" charset="0"/>
+                        </a:rPr>
+                        <m:t>𝑫𝑬𝑽</m:t>
+                      </m:r>
+                      <m:r>
+                        <a:rPr lang="en-US" sz="3600" b="1" i="1" dirty="0">
+                          <a:solidFill>
+                            <a:srgbClr val="1B2733"/>
+                          </a:solidFill>
+                          <a:latin typeface="Cambria Math" panose="02040503050406030204" pitchFamily="18" charset="0"/>
+                        </a:rPr>
+                        <m:t>(</m:t>
+                      </m:r>
+                      <m:r>
+                        <a:rPr lang="en-US" sz="3600" b="1" i="1" dirty="0">
+                          <a:solidFill>
+                            <a:srgbClr val="1B2733"/>
+                          </a:solidFill>
+                          <a:latin typeface="Cambria Math" panose="02040503050406030204" pitchFamily="18" charset="0"/>
+                        </a:rPr>
+                        <m:t>𝑴</m:t>
+                      </m:r>
+                      <m:r>
+                        <a:rPr lang="en-US" sz="3600" b="1" i="1" dirty="0">
+                          <a:solidFill>
+                            <a:srgbClr val="1B2733"/>
+                          </a:solidFill>
+                          <a:latin typeface="Cambria Math" panose="02040503050406030204" pitchFamily="18" charset="0"/>
+                        </a:rPr>
+                        <m:t>) + </m:t>
+                      </m:r>
+                      <m:r>
+                        <a:rPr lang="en-US" sz="3600" b="1" i="1" dirty="0">
+                          <a:solidFill>
+                            <a:srgbClr val="1B2733"/>
+                          </a:solidFill>
+                          <a:latin typeface="Cambria Math" panose="02040503050406030204" pitchFamily="18" charset="0"/>
+                        </a:rPr>
+                        <m:t>𝑷𝑭𝑴</m:t>
+                      </m:r>
+                      <m:r>
+                        <a:rPr lang="en-US" sz="3600" b="1" i="1" dirty="0">
+                          <a:solidFill>
+                            <a:srgbClr val="1B2733"/>
+                          </a:solidFill>
+                          <a:latin typeface="Cambria Math" panose="02040503050406030204" pitchFamily="18" charset="0"/>
+                        </a:rPr>
+                        <m:t>(</m:t>
+                      </m:r>
+                      <m:r>
+                        <a:rPr lang="en-US" sz="3600" b="1" i="1" dirty="0">
+                          <a:solidFill>
+                            <a:srgbClr val="1B2733"/>
+                          </a:solidFill>
+                          <a:latin typeface="Cambria Math" panose="02040503050406030204" pitchFamily="18" charset="0"/>
+                        </a:rPr>
+                        <m:t>𝑴</m:t>
+                      </m:r>
+                      <m:r>
+                        <a:rPr lang="en-US" sz="3600" b="1" i="1" dirty="0">
+                          <a:solidFill>
+                            <a:srgbClr val="1B2733"/>
+                          </a:solidFill>
+                          <a:latin typeface="Cambria Math" panose="02040503050406030204" pitchFamily="18" charset="0"/>
+                        </a:rPr>
+                        <m:t>)·</m:t>
+                      </m:r>
+                      <m:sSup>
+                        <m:sSupPr>
+                          <m:ctrlPr>
+                            <a:rPr lang="en-US" sz="3600" b="1" i="1" dirty="0" smtClean="0">
+                              <a:solidFill>
+                                <a:srgbClr val="1B2733"/>
+                              </a:solidFill>
+                              <a:latin typeface="Cambria Math" panose="02040503050406030204" pitchFamily="18" charset="0"/>
+                            </a:rPr>
+                          </m:ctrlPr>
+                        </m:sSupPr>
+                        <m:e>
+                          <m:r>
+                            <a:rPr lang="en-US" sz="3600" b="1" i="1" dirty="0" smtClean="0">
+                              <a:solidFill>
+                                <a:srgbClr val="1B2733"/>
+                              </a:solidFill>
+                              <a:latin typeface="Cambria Math" panose="02040503050406030204" pitchFamily="18" charset="0"/>
+                            </a:rPr>
+                            <m:t>𝑵</m:t>
+                          </m:r>
+                        </m:e>
+                        <m:sup>
+                          <m:r>
+                            <a:rPr lang="en-US" sz="3600" b="1" i="1" dirty="0" smtClean="0">
+                              <a:solidFill>
+                                <a:srgbClr val="1B2733"/>
+                              </a:solidFill>
+                              <a:latin typeface="Cambria Math" panose="02040503050406030204" pitchFamily="18" charset="0"/>
+                            </a:rPr>
+                            <m:t>𝑳𝑹𝑬</m:t>
+                          </m:r>
+                        </m:sup>
+                      </m:sSup>
+                      <m:r>
+                        <a:rPr lang="en-US" sz="3600" b="1" i="1" dirty="0">
+                          <a:solidFill>
+                            <a:srgbClr val="1B2733"/>
+                          </a:solidFill>
+                          <a:latin typeface="Cambria Math" panose="02040503050406030204" pitchFamily="18" charset="0"/>
+                        </a:rPr>
+                        <m:t> ]</m:t>
+                      </m:r>
+                      <m:r>
+                        <a:rPr lang="en-US" sz="3600" b="1" i="1" dirty="0" smtClean="0">
+                          <a:solidFill>
+                            <a:srgbClr val="1B2733"/>
+                          </a:solidFill>
+                          <a:latin typeface="Cambria Math" panose="02040503050406030204" pitchFamily="18" charset="0"/>
+                        </a:rPr>
+                        <m:t> </m:t>
+                      </m:r>
+                    </m:oMath>
+                  </m:oMathPara>
+                </a14:m>
+                <a:endParaRPr dirty="0"/>
+              </a:p>
+              <a:p>
+                <a:pPr algn="l">
+                  <a:spcAft>
+                    <a:spcPts val="400"/>
+                  </a:spcAft>
+                </a:pPr>
+                <a:endParaRPr lang="en-US" sz="4000" b="0" dirty="0">
+                  <a:solidFill>
+                    <a:srgbClr val="1B2733"/>
+                  </a:solidFill>
+                  <a:latin typeface="Times New Roman"/>
+                </a:endParaRPr>
+              </a:p>
+              <a:p>
+                <a:pPr algn="l">
+                  <a:spcAft>
+                    <a:spcPts val="400"/>
+                  </a:spcAft>
+                </a:pPr>
+                <a:endParaRPr lang="en-US" sz="4000" b="0" dirty="0">
+                  <a:solidFill>
+                    <a:srgbClr val="1B2733"/>
+                  </a:solidFill>
+                  <a:latin typeface="Times New Roman"/>
+                </a:endParaRPr>
+              </a:p>
+              <a:p>
+                <a:pPr marL="571500" indent="-571500" algn="l">
+                  <a:spcAft>
+                    <a:spcPts val="400"/>
+                  </a:spcAft>
+                  <a:buFont typeface="Times New Roman" panose="02020603050405020304" pitchFamily="18" charset="0"/>
+                  <a:buChar char="­"/>
+                </a:pPr>
+                <a:r>
+                  <a:rPr sz="3500" b="1" i="1" dirty="0">
+                    <a:solidFill>
+                      <a:srgbClr val="1B2733"/>
+                    </a:solidFill>
+                    <a:latin typeface="Times New Roman"/>
+                  </a:rPr>
+                  <a:t>M</a:t>
+                </a:r>
+                <a:r>
+                  <a:rPr sz="3500" b="0" dirty="0">
+                    <a:solidFill>
+                      <a:srgbClr val="1B2733"/>
+                    </a:solidFill>
+                    <a:latin typeface="Times New Roman"/>
+                  </a:rPr>
+                  <a:t> = platform mass [kg],  </a:t>
+                </a:r>
+                <a:endParaRPr lang="en-US" sz="3500" b="0" dirty="0">
+                  <a:solidFill>
+                    <a:srgbClr val="1B2733"/>
+                  </a:solidFill>
+                  <a:latin typeface="Times New Roman"/>
+                </a:endParaRPr>
+              </a:p>
+              <a:p>
+                <a:pPr marL="571500" indent="-571500" algn="l">
+                  <a:spcAft>
+                    <a:spcPts val="400"/>
+                  </a:spcAft>
+                  <a:buFont typeface="Times New Roman" panose="02020603050405020304" pitchFamily="18" charset="0"/>
+                  <a:buChar char="­"/>
+                </a:pPr>
+                <a:r>
+                  <a:rPr sz="3500" b="1" i="1" dirty="0">
+                    <a:solidFill>
+                      <a:srgbClr val="1B2733"/>
+                    </a:solidFill>
+                    <a:latin typeface="Times New Roman"/>
+                  </a:rPr>
+                  <a:t>N </a:t>
+                </a:r>
+                <a:r>
+                  <a:rPr sz="3500" b="0" dirty="0">
+                    <a:solidFill>
+                      <a:srgbClr val="1B2733"/>
+                    </a:solidFill>
+                    <a:latin typeface="Times New Roman"/>
+                  </a:rPr>
+                  <a:t>= units,  cost in FY2025 €M.</a:t>
+                </a:r>
+              </a:p>
+              <a:p>
+                <a:pPr marL="571500" indent="-571500" algn="l">
+                  <a:spcAft>
+                    <a:spcPts val="400"/>
+                  </a:spcAft>
+                  <a:buFont typeface="Times New Roman" panose="02020603050405020304" pitchFamily="18" charset="0"/>
+                  <a:buChar char="­"/>
+                </a:pPr>
+                <a:r>
+                  <a:rPr sz="3500" b="1" i="1" dirty="0">
+                    <a:solidFill>
+                      <a:srgbClr val="1B2733"/>
+                    </a:solidFill>
+                    <a:latin typeface="Times New Roman"/>
+                  </a:rPr>
+                  <a:t>LRE</a:t>
+                </a:r>
+                <a:r>
+                  <a:rPr sz="3500" b="0" dirty="0">
+                    <a:solidFill>
+                      <a:srgbClr val="1B2733"/>
+                    </a:solidFill>
+                    <a:latin typeface="Times New Roman"/>
+                  </a:rPr>
+                  <a:t> = 1 + ln(0.9)/ln(2) = 0.848</a:t>
+                </a:r>
+              </a:p>
+              <a:p>
+                <a:pPr marL="571500" indent="-571500" algn="l">
+                  <a:spcAft>
+                    <a:spcPts val="400"/>
+                  </a:spcAft>
+                  <a:buFont typeface="Times New Roman" panose="02020603050405020304" pitchFamily="18" charset="0"/>
+                  <a:buChar char="­"/>
+                </a:pPr>
+                <a14:m>
+                  <m:oMath xmlns:m="http://schemas.openxmlformats.org/officeDocument/2006/math">
+                    <m:r>
+                      <a:rPr lang="en-US" sz="3500" b="1" i="1" dirty="0" smtClean="0">
+                        <a:solidFill>
+                          <a:srgbClr val="1B2733"/>
+                        </a:solidFill>
+                        <a:latin typeface="Cambria Math" panose="02040503050406030204" pitchFamily="18" charset="0"/>
+                      </a:rPr>
+                      <m:t>𝒈</m:t>
+                    </m:r>
+                  </m:oMath>
+                </a14:m>
+                <a:r>
+                  <a:rPr sz="3500" b="0" dirty="0">
+                    <a:solidFill>
+                      <a:srgbClr val="1B2733"/>
+                    </a:solidFill>
+                    <a:latin typeface="Times New Roman"/>
+                  </a:rPr>
+                  <a:t> = 1 traditional, 0.118 New-Space.  </a:t>
+                </a:r>
+                <a:endParaRPr lang="en-US" sz="3500" b="0" dirty="0">
+                  <a:solidFill>
+                    <a:srgbClr val="1B2733"/>
+                  </a:solidFill>
+                  <a:latin typeface="Times New Roman"/>
+                </a:endParaRPr>
+              </a:p>
+              <a:p>
+                <a:pPr marL="571500" indent="-571500" algn="l">
+                  <a:spcAft>
+                    <a:spcPts val="400"/>
+                  </a:spcAft>
+                  <a:buFont typeface="Times New Roman" panose="02020603050405020304" pitchFamily="18" charset="0"/>
+                  <a:buChar char="­"/>
+                </a:pPr>
+                <a:r>
+                  <a:rPr sz="3500" b="1" i="1" dirty="0">
+                    <a:solidFill>
+                      <a:srgbClr val="1B2733"/>
+                    </a:solidFill>
+                    <a:latin typeface="Times New Roman"/>
+                  </a:rPr>
+                  <a:t>F</a:t>
+                </a:r>
+                <a:r>
+                  <a:rPr sz="3500" b="0" dirty="0">
+                    <a:solidFill>
+                      <a:srgbClr val="1B2733"/>
+                    </a:solidFill>
+                    <a:latin typeface="Times New Roman"/>
+                  </a:rPr>
+                  <a:t> = 1 Earth, 1.14 Mars.</a:t>
+                </a:r>
+                <a:endParaRPr sz="3500" b="1" dirty="0">
+                  <a:solidFill>
+                    <a:srgbClr val="1B2733"/>
+                  </a:solidFill>
+                  <a:latin typeface="Times New Roman"/>
+                </a:endParaRPr>
+              </a:p>
+            </p:txBody>
+          </p:sp>
+        </mc:Choice>
+        <mc:Fallback xmlns="">
+          <p:sp>
+            <p:nvSpPr>
+              <p:cNvPr id="12" name="TextBox 11"/>
+              <p:cNvSpPr txBox="1">
+                <a:spLocks noRot="1" noChangeAspect="1" noMove="1" noResize="1" noEditPoints="1" noAdjustHandles="1" noChangeArrowheads="1" noChangeShapeType="1" noTextEdit="1"/>
+              </p:cNvSpPr>
+              <p:nvPr/>
+            </p:nvSpPr>
+            <p:spPr>
+              <a:xfrm>
+                <a:off x="9521647" y="5943600"/>
+                <a:ext cx="11232489" cy="5035546"/>
+              </a:xfrm>
+              <a:prstGeom prst="rect">
+                <a:avLst/>
+              </a:prstGeom>
+              <a:blipFill>
+                <a:blip r:embed="rId2"/>
+                <a:stretch>
+                  <a:fillRect l="-1248" b="-1695"/>
+                </a:stretch>
+              </a:blipFill>
+            </p:spPr>
+            <p:txBody>
+              <a:bodyPr/>
+              <a:lstStyle/>
+              <a:p>
+                <a:r>
+                  <a:rPr lang="en-US">
+                    <a:noFill/>
+                  </a:rPr>
+                  <a:t> </a:t>
+                </a:r>
+              </a:p>
+            </p:txBody>
+          </p:sp>
+        </mc:Fallback>
+      </mc:AlternateContent>
       <p:sp>
         <p:nvSpPr>
           <p:cNvPr id="13" name="Rounded Rectangle 12"/>
@@ -3707,9 +4228,17 @@
               <a:gd name="adj" fmla="val 4000"/>
             </a:avLst>
           </a:prstGeom>
-          <a:solidFill>
-            <a:srgbClr val="22406E"/>
-          </a:solidFill>
+          <a:gradFill>
+            <a:gsLst>
+              <a:gs pos="0">
+                <a:srgbClr val="0D5EAF"/>
+              </a:gs>
+              <a:gs pos="100000">
+                <a:srgbClr val="0C549C"/>
+              </a:gs>
+            </a:gsLst>
+            <a:lin ang="5400000" scaled="0"/>
+          </a:gradFill>
           <a:ln>
             <a:noFill/>
           </a:ln>
@@ -3734,6 +4263,7 @@
           <a:lstStyle/>
           <a:p>
             <a:pPr algn="ctr"/>
+            <a:endParaRPr/>
           </a:p>
         </p:txBody>
       </p:sp>
@@ -3745,27 +4275,37 @@
         </p:nvSpPr>
         <p:spPr>
           <a:xfrm>
-            <a:off x="21226973" y="4754880"/>
-            <a:ext cx="8408730" cy="914400"/>
+            <a:off x="21226973" y="4695018"/>
+            <a:ext cx="8408730" cy="1034129"/>
           </a:xfrm>
           <a:prstGeom prst="rect">
             <a:avLst/>
           </a:prstGeom>
-          <a:noFill/>
-        </p:spPr>
-        <p:txBody>
-          <a:bodyPr wrap="square" anchor="ctr" lIns="109728" rIns="109728" tIns="54864" bIns="54864">
+          <a:gradFill>
+            <a:gsLst>
+              <a:gs pos="0">
+                <a:srgbClr val="0D5EAF"/>
+              </a:gs>
+              <a:gs pos="100000">
+                <a:srgbClr val="0C549C"/>
+              </a:gs>
+            </a:gsLst>
+            <a:lin ang="16200000" scaled="0"/>
+          </a:gradFill>
+        </p:spPr>
+        <p:txBody>
+          <a:bodyPr wrap="square" lIns="109728" tIns="54864" rIns="109728" bIns="54864" anchor="ctr">
             <a:spAutoFit/>
           </a:bodyPr>
           <a:lstStyle/>
           <a:p>
-            <a:pPr algn="l">
+            <a:pPr algn="ctr">
               <a:spcAft>
                 <a:spcPts val="400"/>
               </a:spcAft>
             </a:pPr>
             <a:r>
-              <a:rPr sz="3000" b="1">
+              <a:rPr sz="6000" b="1">
                 <a:solidFill>
                   <a:srgbClr val="FFFFFF"/>
                 </a:solidFill>
@@ -3821,6 +4361,7 @@
           <a:lstStyle/>
           <a:p>
             <a:pPr algn="ctr"/>
+            <a:endParaRPr/>
           </a:p>
         </p:txBody>
       </p:sp>
@@ -3833,7 +4374,7 @@
         <p:spPr>
           <a:xfrm>
             <a:off x="21364133" y="5989320"/>
-            <a:ext cx="8134410" cy="4754880"/>
+            <a:ext cx="8134410" cy="4542782"/>
           </a:xfrm>
           <a:prstGeom prst="rect">
             <a:avLst/>
@@ -3841,7 +4382,7 @@
           <a:noFill/>
         </p:spPr>
         <p:txBody>
-          <a:bodyPr wrap="square" anchor="ctr" lIns="109728" rIns="109728" tIns="54864" bIns="54864">
+          <a:bodyPr wrap="square" lIns="109728" tIns="54864" rIns="109728" bIns="54864" anchor="t">
             <a:spAutoFit/>
           </a:bodyPr>
           <a:lstStyle/>
@@ -3852,16 +4393,34 @@
               </a:spcAft>
             </a:pPr>
             <a:r>
-              <a:rPr sz="6000" b="1">
-                <a:solidFill>
-                  <a:srgbClr val="22406E"/>
+              <a:rPr sz="8800" b="1" dirty="0">
+                <a:solidFill>
+                  <a:srgbClr val="0D5EAF"/>
                 </a:solidFill>
                 <a:latin typeface="Times New Roman"/>
               </a:rPr>
-              <a:t>0.94 </a:t>
-            </a:r>
-            <a:r>
-              <a:rPr sz="2200" b="0">
+              <a:t>0.9</a:t>
+            </a:r>
+            <a:r>
+              <a:rPr lang="de-DE" sz="8800" b="1" dirty="0">
+                <a:solidFill>
+                  <a:srgbClr val="0D5EAF"/>
+                </a:solidFill>
+                <a:latin typeface="Times New Roman"/>
+              </a:rPr>
+              <a:t>4</a:t>
+            </a:r>
+            <a:r>
+              <a:rPr sz="8800" b="1" dirty="0">
+                <a:solidFill>
+                  <a:srgbClr val="22406E"/>
+                </a:solidFill>
+                <a:latin typeface="Times New Roman"/>
+              </a:rPr>
+              <a:t> </a:t>
+            </a:r>
+            <a:r>
+              <a:rPr sz="3600" b="0" dirty="0">
                 <a:solidFill>
                   <a:srgbClr val="1B2733"/>
                 </a:solidFill>
@@ -3877,7 +4436,7 @@
               </a:spcAft>
             </a:pPr>
             <a:r>
-              <a:rPr sz="6000" b="1">
+              <a:rPr sz="8800" b="1" dirty="0">
                 <a:solidFill>
                   <a:srgbClr val="C0392B"/>
                 </a:solidFill>
@@ -3886,7 +4445,7 @@
               <a:t>5–21× </a:t>
             </a:r>
             <a:r>
-              <a:rPr sz="2200" b="0">
+              <a:rPr sz="3600" b="0" dirty="0">
                 <a:solidFill>
                   <a:srgbClr val="1B2733"/>
                 </a:solidFill>
@@ -3902,7 +4461,7 @@
               </a:spcAft>
             </a:pPr>
             <a:r>
-              <a:rPr sz="4400" b="1">
+              <a:rPr sz="6600" b="1" dirty="0">
                 <a:solidFill>
                   <a:srgbClr val="2E7D32"/>
                 </a:solidFill>
@@ -3911,7 +4470,7 @@
               <a:t>≈ </a:t>
             </a:r>
             <a:r>
-              <a:rPr sz="2200" b="0">
+              <a:rPr sz="3600" b="0" dirty="0">
                 <a:solidFill>
                   <a:srgbClr val="1B2733"/>
                 </a:solidFill>
@@ -3927,13 +4486,31 @@
               </a:spcAft>
             </a:pPr>
             <a:r>
-              <a:rPr sz="2200" b="0">
+              <a:rPr sz="3600" b="0" dirty="0">
                 <a:solidFill>
                   <a:srgbClr val="1B2733"/>
                 </a:solidFill>
                 <a:latin typeface="Times New Roman"/>
               </a:rPr>
-              <a:t>but SMAD over-predicts New-Space ~7×</a:t>
+              <a:t>but SMAD over-predicts New-Space ~</a:t>
+            </a:r>
+            <a:r>
+              <a:rPr lang="de-DE" sz="3600" b="0" dirty="0">
+                <a:solidFill>
+                  <a:srgbClr val="1B2733"/>
+                </a:solidFill>
+                <a:latin typeface="Times New Roman"/>
+              </a:rPr>
+              <a:t>7</a:t>
+            </a:r>
+            <a:r>
+              <a:rPr sz="3600" b="0" dirty="0">
+                <a:solidFill>
+                  <a:srgbClr val="1B2733"/>
+                </a:solidFill>
+                <a:latin typeface="Times New Roman"/>
+              </a:rPr>
+              <a:t>×</a:t>
             </a:r>
           </a:p>
         </p:txBody>
@@ -3954,9 +4531,17 @@
               <a:gd name="adj" fmla="val 4000"/>
             </a:avLst>
           </a:prstGeom>
-          <a:solidFill>
-            <a:srgbClr val="22406E"/>
-          </a:solidFill>
+          <a:gradFill>
+            <a:gsLst>
+              <a:gs pos="0">
+                <a:srgbClr val="0D5EAF"/>
+              </a:gs>
+              <a:gs pos="100000">
+                <a:srgbClr val="0C549C"/>
+              </a:gs>
+            </a:gsLst>
+            <a:lin ang="5400000" scaled="0"/>
+          </a:gradFill>
           <a:ln>
             <a:noFill/>
           </a:ln>
@@ -3981,6 +4566,7 @@
           <a:lstStyle/>
           <a:p>
             <a:pPr algn="ctr"/>
+            <a:endParaRPr/>
           </a:p>
         </p:txBody>
       </p:sp>
@@ -3992,27 +4578,37 @@
         </p:nvSpPr>
         <p:spPr>
           <a:xfrm>
-            <a:off x="640080" y="11338560"/>
-            <a:ext cx="14062877" cy="914400"/>
+            <a:off x="640080" y="11278698"/>
+            <a:ext cx="14062877" cy="1034129"/>
           </a:xfrm>
           <a:prstGeom prst="rect">
             <a:avLst/>
           </a:prstGeom>
-          <a:noFill/>
-        </p:spPr>
-        <p:txBody>
-          <a:bodyPr wrap="square" anchor="ctr" lIns="109728" rIns="109728" tIns="54864" bIns="54864">
+          <a:gradFill>
+            <a:gsLst>
+              <a:gs pos="0">
+                <a:srgbClr val="0D5EAF"/>
+              </a:gs>
+              <a:gs pos="100000">
+                <a:srgbClr val="0C549C"/>
+              </a:gs>
+            </a:gsLst>
+            <a:lin ang="16200000" scaled="0"/>
+          </a:gradFill>
+        </p:spPr>
+        <p:txBody>
+          <a:bodyPr wrap="square" lIns="109728" tIns="54864" rIns="109728" bIns="54864" anchor="ctr">
             <a:spAutoFit/>
           </a:bodyPr>
           <a:lstStyle/>
           <a:p>
-            <a:pPr algn="l">
+            <a:pPr algn="ctr">
               <a:spcAft>
                 <a:spcPts val="400"/>
               </a:spcAft>
             </a:pPr>
             <a:r>
-              <a:rPr sz="3000" b="1">
+              <a:rPr sz="6000" b="1" dirty="0">
                 <a:solidFill>
                   <a:srgbClr val="FFFFFF"/>
                 </a:solidFill>
@@ -4025,22 +4621,21 @@
       </p:sp>
       <p:pic>
         <p:nvPicPr>
-          <p:cNvPr id="19" name="Picture 18" descr="B_costperkg.png"/>
+          <p:cNvPr id="19" name="Picture 18"/>
           <p:cNvPicPr>
             <a:picLocks noChangeAspect="1"/>
           </p:cNvPicPr>
           <p:nvPr/>
         </p:nvPicPr>
         <p:blipFill>
-          <a:blip r:embed="rId2"/>
-          <a:stretch>
-            <a:fillRect/>
-          </a:stretch>
+          <a:blip r:embed="rId3"/>
+          <a:srcRect/>
+          <a:stretch/>
         </p:blipFill>
         <p:spPr>
           <a:xfrm>
-            <a:off x="640080" y="12390120"/>
-            <a:ext cx="14062877" cy="6993272"/>
+            <a:off x="640080" y="12390848"/>
+            <a:ext cx="14062877" cy="6991816"/>
           </a:xfrm>
           <a:prstGeom prst="rect">
             <a:avLst/>
@@ -4056,7 +4651,7 @@
         <p:spPr>
           <a:xfrm>
             <a:off x="640080" y="19474832"/>
-            <a:ext cx="14062877" cy="1371600"/>
+            <a:ext cx="14062877" cy="1095685"/>
           </a:xfrm>
           <a:prstGeom prst="rect">
             <a:avLst/>
@@ -4064,7 +4659,7 @@
           <a:noFill/>
         </p:spPr>
         <p:txBody>
-          <a:bodyPr wrap="square" anchor="t" lIns="109728" rIns="109728" tIns="54864" bIns="54864">
+          <a:bodyPr wrap="square" lIns="109728" tIns="54864" rIns="109728" bIns="54864" anchor="t">
             <a:spAutoFit/>
           </a:bodyPr>
           <a:lstStyle/>
@@ -4075,7 +4670,7 @@
               </a:spcAft>
             </a:pPr>
             <a:r>
-              <a:rPr sz="1800" b="0">
+              <a:rPr sz="3200" b="0" dirty="0">
                 <a:solidFill>
                   <a:srgbClr val="1B2733"/>
                 </a:solidFill>
@@ -4102,9 +4697,17 @@
               <a:gd name="adj" fmla="val 4000"/>
             </a:avLst>
           </a:prstGeom>
-          <a:solidFill>
-            <a:srgbClr val="22406E"/>
-          </a:solidFill>
+          <a:gradFill>
+            <a:gsLst>
+              <a:gs pos="0">
+                <a:srgbClr val="0D5EAF"/>
+              </a:gs>
+              <a:gs pos="100000">
+                <a:srgbClr val="0C549C"/>
+              </a:gs>
+            </a:gsLst>
+            <a:lin ang="5400000" scaled="0"/>
+          </a:gradFill>
           <a:ln>
             <a:noFill/>
           </a:ln>
@@ -4129,6 +4732,7 @@
           <a:lstStyle/>
           <a:p>
             <a:pPr algn="ctr"/>
+            <a:endParaRPr/>
           </a:p>
         </p:txBody>
       </p:sp>
@@ -4140,8 +4744,57 @@
         </p:nvSpPr>
         <p:spPr>
           <a:xfrm>
-            <a:off x="15572826" y="11338560"/>
-            <a:ext cx="14062877" cy="914400"/>
+            <a:off x="15572826" y="11278698"/>
+            <a:ext cx="14062877" cy="1034129"/>
+          </a:xfrm>
+          <a:prstGeom prst="rect">
+            <a:avLst/>
+          </a:prstGeom>
+          <a:gradFill>
+            <a:gsLst>
+              <a:gs pos="0">
+                <a:srgbClr val="0D5EAF"/>
+              </a:gs>
+              <a:gs pos="100000">
+                <a:srgbClr val="0C549C"/>
+              </a:gs>
+            </a:gsLst>
+            <a:lin ang="16200000" scaled="0"/>
+          </a:gradFill>
+        </p:spPr>
+        <p:txBody>
+          <a:bodyPr wrap="square" lIns="109728" tIns="54864" rIns="109728" bIns="54864" anchor="ctr">
+            <a:spAutoFit/>
+          </a:bodyPr>
+          <a:lstStyle/>
+          <a:p>
+            <a:pPr algn="ctr">
+              <a:spcAft>
+                <a:spcPts val="400"/>
+              </a:spcAft>
+            </a:pPr>
+            <a:r>
+              <a:rPr sz="6000" b="1">
+                <a:solidFill>
+                  <a:srgbClr val="FFFFFF"/>
+                </a:solidFill>
+                <a:latin typeface="Times New Roman"/>
+              </a:rPr>
+              <a:t>Validation</a:t>
+            </a:r>
+          </a:p>
+        </p:txBody>
+      </p:sp>
+      <p:sp>
+        <p:nvSpPr>
+          <p:cNvPr id="24" name="TextBox 23"/>
+          <p:cNvSpPr txBox="1"/>
+          <p:nvPr/>
+        </p:nvSpPr>
+        <p:spPr>
+          <a:xfrm>
+            <a:off x="15572256" y="19453723"/>
+            <a:ext cx="14062877" cy="1095685"/>
           </a:xfrm>
           <a:prstGeom prst="rect">
             <a:avLst/>
@@ -4149,7 +4802,7 @@
           <a:noFill/>
         </p:spPr>
         <p:txBody>
-          <a:bodyPr wrap="square" anchor="ctr" lIns="109728" rIns="109728" tIns="54864" bIns="54864">
+          <a:bodyPr wrap="square" lIns="109728" tIns="54864" rIns="109728" bIns="54864" anchor="t">
             <a:spAutoFit/>
           </a:bodyPr>
           <a:lstStyle/>
@@ -4160,76 +4813,13 @@
               </a:spcAft>
             </a:pPr>
             <a:r>
-              <a:rPr sz="3000" b="1">
-                <a:solidFill>
-                  <a:srgbClr val="FFFFFF"/>
+              <a:rPr sz="3200" b="0" dirty="0">
+                <a:solidFill>
+                  <a:srgbClr val="1B2733"/>
                 </a:solidFill>
                 <a:latin typeface="Times New Roman"/>
               </a:rPr>
-              <a:t>Validation</a:t>
-            </a:r>
-          </a:p>
-        </p:txBody>
-      </p:sp>
-      <p:pic>
-        <p:nvPicPr>
-          <p:cNvPr id="23" name="Picture 22" descr="A_validation.png"/>
-          <p:cNvPicPr>
-            <a:picLocks noChangeAspect="1"/>
-          </p:cNvPicPr>
-          <p:nvPr/>
-        </p:nvPicPr>
-        <p:blipFill>
-          <a:blip r:embed="rId3"/>
-          <a:stretch>
-            <a:fillRect/>
-          </a:stretch>
-        </p:blipFill>
-        <p:spPr>
-          <a:xfrm>
-            <a:off x="15572826" y="12390120"/>
-            <a:ext cx="14062877" cy="6599864"/>
-          </a:xfrm>
-          <a:prstGeom prst="rect">
-            <a:avLst/>
-          </a:prstGeom>
-        </p:spPr>
-      </p:pic>
-      <p:sp>
-        <p:nvSpPr>
-          <p:cNvPr id="24" name="TextBox 23"/>
-          <p:cNvSpPr txBox="1"/>
-          <p:nvPr/>
-        </p:nvSpPr>
-        <p:spPr>
-          <a:xfrm>
-            <a:off x="15572826" y="19081424"/>
-            <a:ext cx="14062877" cy="1371600"/>
-          </a:xfrm>
-          <a:prstGeom prst="rect">
-            <a:avLst/>
-          </a:prstGeom>
-          <a:noFill/>
-        </p:spPr>
-        <p:txBody>
-          <a:bodyPr wrap="square" anchor="t" lIns="109728" rIns="109728" tIns="54864" bIns="54864">
-            <a:spAutoFit/>
-          </a:bodyPr>
-          <a:lstStyle/>
-          <a:p>
-            <a:pPr algn="l">
-              <a:spcAft>
-                <a:spcPts val="400"/>
-              </a:spcAft>
-            </a:pPr>
-            <a:r>
-              <a:rPr sz="1800" b="0">
-                <a:solidFill>
-                  <a:srgbClr val="1B2733"/>
-                </a:solidFill>
-                <a:latin typeface="Times New Roman"/>
-              </a:rPr>
-              <a:t>Leave-one-out cross-validation over 25 systems. The CER tracks unit cost across three orders of magnitude (R² = 0.94 pooled, 0.85 traditional-only).</a:t>
+              <a:t>Leave-one-out cross-validation over 27 systems. The CER tracks unit cost across three orders of magnitude (R² = 0.92 pooled, 0.81 traditional-only).</a:t>
             </a:r>
           </a:p>
         </p:txBody>
@@ -4242,7 +4832,7 @@
         </p:nvSpPr>
         <p:spPr>
           <a:xfrm>
-            <a:off x="640080" y="20116800"/>
+            <a:off x="640080" y="20983067"/>
             <a:ext cx="14062877" cy="914400"/>
           </a:xfrm>
           <a:prstGeom prst="roundRect">
@@ -4250,9 +4840,17 @@
               <a:gd name="adj" fmla="val 4000"/>
             </a:avLst>
           </a:prstGeom>
-          <a:solidFill>
-            <a:srgbClr val="22406E"/>
-          </a:solidFill>
+          <a:gradFill>
+            <a:gsLst>
+              <a:gs pos="0">
+                <a:srgbClr val="0D5EAF"/>
+              </a:gs>
+              <a:gs pos="100000">
+                <a:srgbClr val="0C549C"/>
+              </a:gs>
+            </a:gsLst>
+            <a:lin ang="5400000" scaled="0"/>
+          </a:gradFill>
           <a:ln>
             <a:noFill/>
           </a:ln>
@@ -4277,6 +4875,7 @@
           <a:lstStyle/>
           <a:p>
             <a:pPr algn="ctr"/>
+            <a:endParaRPr/>
           </a:p>
         </p:txBody>
       </p:sp>
@@ -4288,27 +4887,29 @@
         </p:nvSpPr>
         <p:spPr>
           <a:xfrm>
-            <a:off x="640080" y="20116800"/>
-            <a:ext cx="14062877" cy="914400"/>
+            <a:off x="640080" y="20923205"/>
+            <a:ext cx="14062877" cy="1034129"/>
           </a:xfrm>
           <a:prstGeom prst="rect">
             <a:avLst/>
           </a:prstGeom>
-          <a:noFill/>
-        </p:spPr>
-        <p:txBody>
-          <a:bodyPr wrap="square" anchor="ctr" lIns="109728" rIns="109728" tIns="54864" bIns="54864">
+          <a:solidFill>
+            <a:srgbClr val="0D5EAF"/>
+          </a:solidFill>
+        </p:spPr>
+        <p:txBody>
+          <a:bodyPr wrap="square" lIns="109728" tIns="54864" rIns="109728" bIns="54864" anchor="ctr">
             <a:spAutoFit/>
           </a:bodyPr>
           <a:lstStyle/>
           <a:p>
-            <a:pPr algn="l">
+            <a:pPr algn="ctr">
               <a:spcAft>
                 <a:spcPts val="400"/>
               </a:spcAft>
             </a:pPr>
             <a:r>
-              <a:rPr sz="3000" b="1">
+              <a:rPr sz="6000" b="1" dirty="0">
                 <a:solidFill>
                   <a:srgbClr val="FFFFFF"/>
                 </a:solidFill>
@@ -4321,7 +4922,7 @@
       </p:sp>
       <p:pic>
         <p:nvPicPr>
-          <p:cNvPr id="27" name="Picture 26" descr="E_devfraction.png"/>
+          <p:cNvPr id="27" name="Picture 26"/>
           <p:cNvPicPr>
             <a:picLocks noChangeAspect="1"/>
           </p:cNvPicPr>
@@ -4329,14 +4930,13 @@
         </p:nvPicPr>
         <p:blipFill>
           <a:blip r:embed="rId4"/>
-          <a:stretch>
-            <a:fillRect/>
-          </a:stretch>
+          <a:srcRect/>
+          <a:stretch/>
         </p:blipFill>
         <p:spPr>
           <a:xfrm>
-            <a:off x="640080" y="21168360"/>
-            <a:ext cx="14062877" cy="6052377"/>
+            <a:off x="640080" y="22037328"/>
+            <a:ext cx="14062877" cy="6046975"/>
           </a:xfrm>
           <a:prstGeom prst="rect">
             <a:avLst/>
@@ -4351,8 +4951,8 @@
         </p:nvSpPr>
         <p:spPr>
           <a:xfrm>
-            <a:off x="640080" y="27312177"/>
-            <a:ext cx="14062877" cy="1371600"/>
+            <a:off x="640080" y="28178444"/>
+            <a:ext cx="14062877" cy="1095685"/>
           </a:xfrm>
           <a:prstGeom prst="rect">
             <a:avLst/>
@@ -4360,7 +4960,7 @@
           <a:noFill/>
         </p:spPr>
         <p:txBody>
-          <a:bodyPr wrap="square" anchor="t" lIns="109728" rIns="109728" tIns="54864" bIns="54864">
+          <a:bodyPr wrap="square" lIns="109728" tIns="54864" rIns="109728" bIns="54864" anchor="t">
             <a:spAutoFit/>
           </a:bodyPr>
           <a:lstStyle/>
@@ -4371,13 +4971,31 @@
               </a:spcAft>
             </a:pPr>
             <a:r>
-              <a:rPr sz="1800" b="0">
+              <a:rPr sz="3200" b="0" dirty="0">
                 <a:solidFill>
                   <a:srgbClr val="1B2733"/>
                 </a:solidFill>
                 <a:latin typeface="Times New Roman"/>
               </a:rPr>
-              <a:t>The DEV/PFM split is fixed by disclosed programme budgets (US SARs, ESA), not by the fit.</a:t>
+              <a:t>The DEV/PFM split is fixed by disclosed </a:t>
+            </a:r>
+            <a:r>
+              <a:rPr sz="3200" b="0" dirty="0" err="1">
+                <a:solidFill>
+                  <a:srgbClr val="1B2733"/>
+                </a:solidFill>
+                <a:latin typeface="Times New Roman"/>
+              </a:rPr>
+              <a:t>programme</a:t>
+            </a:r>
+            <a:r>
+              <a:rPr sz="3200" b="0" dirty="0">
+                <a:solidFill>
+                  <a:srgbClr val="1B2733"/>
+                </a:solidFill>
+                <a:latin typeface="Times New Roman"/>
+              </a:rPr>
+              <a:t> budgets (US SARs, ESA, GAO), not by the fit.</a:t>
             </a:r>
           </a:p>
         </p:txBody>
@@ -4390,7 +5008,7 @@
         </p:nvSpPr>
         <p:spPr>
           <a:xfrm>
-            <a:off x="15572826" y="20116800"/>
+            <a:off x="15572826" y="20983067"/>
             <a:ext cx="14062877" cy="914400"/>
           </a:xfrm>
           <a:prstGeom prst="roundRect">
@@ -4398,9 +5016,17 @@
               <a:gd name="adj" fmla="val 4000"/>
             </a:avLst>
           </a:prstGeom>
-          <a:solidFill>
-            <a:srgbClr val="22406E"/>
-          </a:solidFill>
+          <a:gradFill>
+            <a:gsLst>
+              <a:gs pos="0">
+                <a:srgbClr val="0D5EAF"/>
+              </a:gs>
+              <a:gs pos="100000">
+                <a:srgbClr val="0C549C"/>
+              </a:gs>
+            </a:gsLst>
+            <a:lin ang="5400000" scaled="0"/>
+          </a:gradFill>
           <a:ln>
             <a:noFill/>
           </a:ln>
@@ -4425,6 +5051,7 @@
           <a:lstStyle/>
           <a:p>
             <a:pPr algn="ctr"/>
+            <a:endParaRPr/>
           </a:p>
         </p:txBody>
       </p:sp>
@@ -4436,8 +5063,49 @@
         </p:nvSpPr>
         <p:spPr>
           <a:xfrm>
-            <a:off x="15572826" y="20116800"/>
-            <a:ext cx="14062877" cy="914400"/>
+            <a:off x="15572826" y="20923205"/>
+            <a:ext cx="14062877" cy="1034129"/>
+          </a:xfrm>
+          <a:prstGeom prst="rect">
+            <a:avLst/>
+          </a:prstGeom>
+          <a:solidFill>
+            <a:srgbClr val="0D5EAF"/>
+          </a:solidFill>
+        </p:spPr>
+        <p:txBody>
+          <a:bodyPr wrap="square" lIns="109728" tIns="54864" rIns="109728" bIns="54864" anchor="ctr">
+            <a:spAutoFit/>
+          </a:bodyPr>
+          <a:lstStyle/>
+          <a:p>
+            <a:pPr algn="ctr">
+              <a:spcAft>
+                <a:spcPts val="400"/>
+              </a:spcAft>
+            </a:pPr>
+            <a:r>
+              <a:rPr sz="6000" b="1">
+                <a:solidFill>
+                  <a:srgbClr val="FFFFFF"/>
+                </a:solidFill>
+                <a:latin typeface="Times New Roman"/>
+              </a:rPr>
+              <a:t>Cost vs mass and constellation size</a:t>
+            </a:r>
+          </a:p>
+        </p:txBody>
+      </p:sp>
+      <p:sp>
+        <p:nvSpPr>
+          <p:cNvPr id="32" name="TextBox 31"/>
+          <p:cNvSpPr txBox="1"/>
+          <p:nvPr/>
+        </p:nvSpPr>
+        <p:spPr>
+          <a:xfrm>
+            <a:off x="15572826" y="28178443"/>
+            <a:ext cx="14062877" cy="1095685"/>
           </a:xfrm>
           <a:prstGeom prst="rect">
             <a:avLst/>
@@ -4445,7 +5113,7 @@
           <a:noFill/>
         </p:spPr>
         <p:txBody>
-          <a:bodyPr wrap="square" anchor="ctr" lIns="109728" rIns="109728" tIns="54864" bIns="54864">
+          <a:bodyPr wrap="square" lIns="109728" tIns="54864" rIns="109728" bIns="54864" anchor="t">
             <a:spAutoFit/>
           </a:bodyPr>
           <a:lstStyle/>
@@ -4456,70 +5124,7 @@
               </a:spcAft>
             </a:pPr>
             <a:r>
-              <a:rPr sz="3000" b="1">
-                <a:solidFill>
-                  <a:srgbClr val="FFFFFF"/>
-                </a:solidFill>
-                <a:latin typeface="Times New Roman"/>
-              </a:rPr>
-              <a:t>Cost vs mass and constellation size</a:t>
-            </a:r>
-          </a:p>
-        </p:txBody>
-      </p:sp>
-      <p:pic>
-        <p:nvPicPr>
-          <p:cNvPr id="31" name="Picture 30" descr="F_heatmap.png"/>
-          <p:cNvPicPr>
-            <a:picLocks noChangeAspect="1"/>
-          </p:cNvPicPr>
-          <p:nvPr/>
-        </p:nvPicPr>
-        <p:blipFill>
-          <a:blip r:embed="rId5"/>
-          <a:stretch>
-            <a:fillRect/>
-          </a:stretch>
-        </p:blipFill>
-        <p:spPr>
-          <a:xfrm>
-            <a:off x="15572826" y="21168360"/>
-            <a:ext cx="14062877" cy="5557070"/>
-          </a:xfrm>
-          <a:prstGeom prst="rect">
-            <a:avLst/>
-          </a:prstGeom>
-        </p:spPr>
-      </p:pic>
-      <p:sp>
-        <p:nvSpPr>
-          <p:cNvPr id="32" name="TextBox 31"/>
-          <p:cNvSpPr txBox="1"/>
-          <p:nvPr/>
-        </p:nvSpPr>
-        <p:spPr>
-          <a:xfrm>
-            <a:off x="15572826" y="26816870"/>
-            <a:ext cx="14062877" cy="1371600"/>
-          </a:xfrm>
-          <a:prstGeom prst="rect">
-            <a:avLst/>
-          </a:prstGeom>
-          <a:noFill/>
-        </p:spPr>
-        <p:txBody>
-          <a:bodyPr wrap="square" anchor="t" lIns="109728" rIns="109728" tIns="54864" bIns="54864">
-            <a:spAutoFit/>
-          </a:bodyPr>
-          <a:lstStyle/>
-          <a:p>
-            <a:pPr algn="l">
-              <a:spcAft>
-                <a:spcPts val="400"/>
-              </a:spcAft>
-            </a:pPr>
-            <a:r>
-              <a:rPr sz="1800" b="0">
+              <a:rPr sz="3200" b="0" dirty="0">
                 <a:solidFill>
                   <a:srgbClr val="1B2733"/>
                 </a:solidFill>
@@ -4538,7 +5143,7 @@
         </p:nvSpPr>
         <p:spPr>
           <a:xfrm>
-            <a:off x="640080" y="28895040"/>
+            <a:off x="640080" y="29701995"/>
             <a:ext cx="14062877" cy="914400"/>
           </a:xfrm>
           <a:prstGeom prst="roundRect">
@@ -4546,9 +5151,17 @@
               <a:gd name="adj" fmla="val 4000"/>
             </a:avLst>
           </a:prstGeom>
-          <a:solidFill>
-            <a:srgbClr val="22406E"/>
-          </a:solidFill>
+          <a:gradFill>
+            <a:gsLst>
+              <a:gs pos="0">
+                <a:srgbClr val="0D5EAF"/>
+              </a:gs>
+              <a:gs pos="100000">
+                <a:srgbClr val="0C549C"/>
+              </a:gs>
+            </a:gsLst>
+            <a:lin ang="5400000" scaled="0"/>
+          </a:gradFill>
           <a:ln>
             <a:noFill/>
           </a:ln>
@@ -4573,6 +5186,7 @@
           <a:lstStyle/>
           <a:p>
             <a:pPr algn="ctr"/>
+            <a:endParaRPr/>
           </a:p>
         </p:txBody>
       </p:sp>
@@ -4584,27 +5198,37 @@
         </p:nvSpPr>
         <p:spPr>
           <a:xfrm>
-            <a:off x="640080" y="28895040"/>
-            <a:ext cx="14062877" cy="914400"/>
+            <a:off x="640080" y="29642133"/>
+            <a:ext cx="14062877" cy="1034129"/>
           </a:xfrm>
           <a:prstGeom prst="rect">
             <a:avLst/>
           </a:prstGeom>
-          <a:noFill/>
-        </p:spPr>
-        <p:txBody>
-          <a:bodyPr wrap="square" anchor="ctr" lIns="109728" rIns="109728" tIns="54864" bIns="54864">
+          <a:gradFill>
+            <a:gsLst>
+              <a:gs pos="0">
+                <a:srgbClr val="0D5EAF"/>
+              </a:gs>
+              <a:gs pos="100000">
+                <a:srgbClr val="0C549C"/>
+              </a:gs>
+            </a:gsLst>
+            <a:lin ang="5400000" scaled="0"/>
+          </a:gradFill>
+        </p:spPr>
+        <p:txBody>
+          <a:bodyPr wrap="square" lIns="109728" tIns="54864" rIns="109728" bIns="54864" anchor="ctr">
             <a:spAutoFit/>
           </a:bodyPr>
           <a:lstStyle/>
           <a:p>
-            <a:pPr algn="l">
+            <a:pPr algn="ctr">
               <a:spcAft>
                 <a:spcPts val="400"/>
               </a:spcAft>
             </a:pPr>
             <a:r>
-              <a:rPr sz="3000" b="1">
+              <a:rPr sz="6000" b="1" dirty="0">
                 <a:solidFill>
                   <a:srgbClr val="FFFFFF"/>
                 </a:solidFill>
@@ -4623,8 +5247,8 @@
         </p:nvSpPr>
         <p:spPr>
           <a:xfrm>
-            <a:off x="640080" y="29946600"/>
-            <a:ext cx="14062877" cy="3840480"/>
+            <a:off x="640080" y="30753555"/>
+            <a:ext cx="14062877" cy="5223136"/>
           </a:xfrm>
           <a:prstGeom prst="roundRect">
             <a:avLst>
@@ -4660,6 +5284,7 @@
           <a:lstStyle/>
           <a:p>
             <a:pPr algn="ctr"/>
+            <a:endParaRPr/>
           </a:p>
         </p:txBody>
       </p:sp>
@@ -4671,8 +5296,8 @@
         </p:nvSpPr>
         <p:spPr>
           <a:xfrm>
-            <a:off x="731519" y="30038040"/>
-            <a:ext cx="13879997" cy="3657600"/>
+            <a:off x="731519" y="30844995"/>
+            <a:ext cx="13879997" cy="2326791"/>
           </a:xfrm>
           <a:prstGeom prst="rect">
             <a:avLst/>
@@ -4680,7 +5305,7 @@
           <a:noFill/>
         </p:spPr>
         <p:txBody>
-          <a:bodyPr wrap="square" anchor="t" lIns="109728" rIns="109728" tIns="54864" bIns="54864">
+          <a:bodyPr wrap="square" lIns="109728" tIns="54864" rIns="109728" bIns="54864" anchor="t">
             <a:spAutoFit/>
           </a:bodyPr>
           <a:lstStyle/>
@@ -4691,7 +5316,7 @@
               </a:spcAft>
             </a:pPr>
             <a:r>
-              <a:rPr sz="2200" b="0">
+              <a:rPr sz="3600" b="0" dirty="0">
                 <a:solidFill>
                   <a:srgbClr val="1B2733"/>
                 </a:solidFill>
@@ -4700,7 +5325,7 @@
               <a:t>A subsystem bottom-up estimate gives a Mars bus-cost increase of </a:t>
             </a:r>
             <a:r>
-              <a:rPr sz="2200" b="1">
+              <a:rPr sz="3600" b="1" dirty="0">
                 <a:solidFill>
                   <a:srgbClr val="1B2733"/>
                 </a:solidFill>
@@ -4709,7 +5334,7 @@
               <a:t>10% ± 4.5%</a:t>
             </a:r>
             <a:r>
-              <a:rPr sz="2200" b="0">
+              <a:rPr sz="3600" b="0" dirty="0">
                 <a:solidFill>
                   <a:srgbClr val="1B2733"/>
                 </a:solidFill>
@@ -4718,7 +5343,7 @@
               <a:t>, adopted as </a:t>
             </a:r>
             <a:r>
-              <a:rPr sz="2200" b="1">
+              <a:rPr sz="3600" b="1" dirty="0">
                 <a:solidFill>
                   <a:srgbClr val="1B2733"/>
                 </a:solidFill>
@@ -4727,13 +5352,31 @@
               <a:t>F = 1.14</a:t>
             </a:r>
             <a:r>
-              <a:rPr sz="2200" b="0">
+              <a:rPr sz="3600" b="0" dirty="0">
                 <a:solidFill>
                   <a:srgbClr val="1B2733"/>
                 </a:solidFill>
                 <a:latin typeface="Times New Roman"/>
               </a:rPr>
-              <a:t> (Earth F = 1). This replaces SMAD/QuickCost's blanket 1.29 planetary factor. Sources: RAND TR-418; Jones (ICES 2015).</a:t>
+              <a:t> (Earth F = 1). This replaces SMAD/</a:t>
+            </a:r>
+            <a:r>
+              <a:rPr sz="3600" b="0" dirty="0" err="1">
+                <a:solidFill>
+                  <a:srgbClr val="1B2733"/>
+                </a:solidFill>
+                <a:latin typeface="Times New Roman"/>
+              </a:rPr>
+              <a:t>QuickCost's</a:t>
+            </a:r>
+            <a:r>
+              <a:rPr sz="3600" b="0" dirty="0">
+                <a:solidFill>
+                  <a:srgbClr val="1B2733"/>
+                </a:solidFill>
+                <a:latin typeface="Times New Roman"/>
+              </a:rPr>
+              <a:t> blanket 1.29 planetary factor. Sources: RAND TR-418; Jones (ICES 2015).</a:t>
             </a:r>
           </a:p>
         </p:txBody>
@@ -4746,7 +5389,7 @@
         </p:nvSpPr>
         <p:spPr>
           <a:xfrm>
-            <a:off x="15572826" y="28895040"/>
+            <a:off x="15572826" y="29701995"/>
             <a:ext cx="14062877" cy="914400"/>
           </a:xfrm>
           <a:prstGeom prst="roundRect">
@@ -4754,9 +5397,17 @@
               <a:gd name="adj" fmla="val 4000"/>
             </a:avLst>
           </a:prstGeom>
-          <a:solidFill>
-            <a:srgbClr val="22406E"/>
-          </a:solidFill>
+          <a:gradFill>
+            <a:gsLst>
+              <a:gs pos="0">
+                <a:srgbClr val="0D5EAF"/>
+              </a:gs>
+              <a:gs pos="100000">
+                <a:srgbClr val="0C549C"/>
+              </a:gs>
+            </a:gsLst>
+            <a:lin ang="5400000" scaled="0"/>
+          </a:gradFill>
           <a:ln>
             <a:noFill/>
           </a:ln>
@@ -4781,6 +5432,7 @@
           <a:lstStyle/>
           <a:p>
             <a:pPr algn="ctr"/>
+            <a:endParaRPr/>
           </a:p>
         </p:txBody>
       </p:sp>
@@ -4792,27 +5444,37 @@
         </p:nvSpPr>
         <p:spPr>
           <a:xfrm>
-            <a:off x="15572826" y="28895040"/>
-            <a:ext cx="14062877" cy="914400"/>
+            <a:off x="15572826" y="29642133"/>
+            <a:ext cx="14062877" cy="1034129"/>
           </a:xfrm>
           <a:prstGeom prst="rect">
             <a:avLst/>
           </a:prstGeom>
-          <a:noFill/>
-        </p:spPr>
-        <p:txBody>
-          <a:bodyPr wrap="square" anchor="ctr" lIns="109728" rIns="109728" tIns="54864" bIns="54864">
+          <a:gradFill>
+            <a:gsLst>
+              <a:gs pos="0">
+                <a:srgbClr val="0D5EAF"/>
+              </a:gs>
+              <a:gs pos="100000">
+                <a:srgbClr val="0C549C"/>
+              </a:gs>
+            </a:gsLst>
+            <a:lin ang="5400000" scaled="0"/>
+          </a:gradFill>
+        </p:spPr>
+        <p:txBody>
+          <a:bodyPr wrap="square" lIns="109728" tIns="54864" rIns="109728" bIns="54864" anchor="ctr">
             <a:spAutoFit/>
           </a:bodyPr>
           <a:lstStyle/>
           <a:p>
-            <a:pPr algn="l">
+            <a:pPr algn="ctr">
               <a:spcAft>
                 <a:spcPts val="400"/>
               </a:spcAft>
             </a:pPr>
             <a:r>
-              <a:rPr sz="3000" b="1">
+              <a:rPr sz="6000" b="1">
                 <a:solidFill>
                   <a:srgbClr val="FFFFFF"/>
                 </a:solidFill>
@@ -4831,8 +5493,8 @@
         </p:nvSpPr>
         <p:spPr>
           <a:xfrm>
-            <a:off x="15572826" y="29946600"/>
-            <a:ext cx="14062877" cy="3840480"/>
+            <a:off x="15572826" y="30753554"/>
+            <a:ext cx="14062877" cy="5223135"/>
           </a:xfrm>
           <a:prstGeom prst="roundRect">
             <a:avLst>
@@ -4868,6 +5530,7 @@
           <a:lstStyle/>
           <a:p>
             <a:pPr algn="ctr"/>
+            <a:endParaRPr/>
           </a:p>
         </p:txBody>
       </p:sp>
@@ -4879,8 +5542,8 @@
         </p:nvSpPr>
         <p:spPr>
           <a:xfrm>
-            <a:off x="15664266" y="30038040"/>
-            <a:ext cx="13879997" cy="3657600"/>
+            <a:off x="15664266" y="30844995"/>
+            <a:ext cx="13879997" cy="2326791"/>
           </a:xfrm>
           <a:prstGeom prst="rect">
             <a:avLst/>
@@ -4888,7 +5551,7 @@
           <a:noFill/>
         </p:spPr>
         <p:txBody>
-          <a:bodyPr wrap="square" anchor="t" lIns="109728" rIns="109728" tIns="54864" bIns="54864">
+          <a:bodyPr wrap="square" lIns="109728" tIns="54864" rIns="109728" bIns="54864" anchor="t">
             <a:spAutoFit/>
           </a:bodyPr>
           <a:lstStyle/>
@@ -4899,7 +5562,7 @@
               </a:spcAft>
             </a:pPr>
             <a:r>
-              <a:rPr sz="2200" b="0">
+              <a:rPr sz="3600" b="0" dirty="0">
                 <a:solidFill>
                   <a:srgbClr val="1B2733"/>
                 </a:solidFill>
@@ -4908,7 +5571,7 @@
               <a:t>Mission operations use the SME-SMAD Table 11-28 model: </a:t>
             </a:r>
             <a:r>
-              <a:rPr sz="2200" b="1">
+              <a:rPr sz="3600" b="1" dirty="0">
                 <a:solidFill>
                   <a:srgbClr val="1B2733"/>
                 </a:solidFill>
@@ -4917,7 +5580,7 @@
               <a:t>€159 M for 31 satellites over 5 years</a:t>
             </a:r>
             <a:r>
-              <a:rPr sz="2200" b="0">
+              <a:rPr sz="3600" b="0" dirty="0">
                 <a:solidFill>
                   <a:srgbClr val="1B2733"/>
                 </a:solidFill>
@@ -4930,14 +5593,63 @@
       </p:sp>
       <p:sp>
         <p:nvSpPr>
-          <p:cNvPr id="41" name="Rounded Rectangle 40"/>
+          <p:cNvPr id="42" name="TextBox 41"/>
+          <p:cNvSpPr txBox="1"/>
+          <p:nvPr/>
+        </p:nvSpPr>
+        <p:spPr>
+          <a:xfrm>
+            <a:off x="548640" y="37531819"/>
+            <a:ext cx="14154317" cy="1034129"/>
+          </a:xfrm>
+          <a:prstGeom prst="rect">
+            <a:avLst/>
+          </a:prstGeom>
+          <a:gradFill>
+            <a:gsLst>
+              <a:gs pos="0">
+                <a:srgbClr val="0D5EAF"/>
+              </a:gs>
+              <a:gs pos="100000">
+                <a:srgbClr val="0C549C"/>
+              </a:gs>
+            </a:gsLst>
+            <a:lin ang="5400000" scaled="0"/>
+          </a:gradFill>
+        </p:spPr>
+        <p:txBody>
+          <a:bodyPr wrap="square" lIns="109728" tIns="54864" rIns="109728" bIns="54864" anchor="ctr">
+            <a:spAutoFit/>
+          </a:bodyPr>
+          <a:lstStyle/>
+          <a:p>
+            <a:pPr algn="l">
+              <a:spcAft>
+                <a:spcPts val="400"/>
+              </a:spcAft>
+            </a:pPr>
+            <a:r>
+              <a:rPr sz="6000" b="1" dirty="0">
+                <a:solidFill>
+                  <a:srgbClr val="FFFFFF"/>
+                </a:solidFill>
+                <a:latin typeface="Times New Roman"/>
+              </a:rPr>
+              <a:t>Data and code</a:t>
+            </a:r>
+          </a:p>
+        </p:txBody>
+      </p:sp>
+      <p:sp>
+        <p:nvSpPr>
+          <p:cNvPr id="43" name="Rounded Rectangle 42"/>
           <p:cNvSpPr/>
           <p:nvPr/>
         </p:nvSpPr>
         <p:spPr>
           <a:xfrm>
-            <a:off x="640080" y="34290000"/>
-            <a:ext cx="28995624" cy="914400"/>
+            <a:off x="548639" y="38643243"/>
+            <a:ext cx="14154317" cy="3840480"/>
           </a:xfrm>
           <a:prstGeom prst="roundRect">
             <a:avLst>
@@ -4945,10 +5657,12 @@
             </a:avLst>
           </a:prstGeom>
           <a:solidFill>
-            <a:srgbClr val="22406E"/>
+            <a:srgbClr val="FFFFFF"/>
           </a:solidFill>
-          <a:ln>
-            <a:noFill/>
+          <a:ln w="12700">
+            <a:solidFill>
+              <a:srgbClr val="C7CED8"/>
+            </a:solidFill>
           </a:ln>
           <a:effectLst/>
         </p:spPr>
@@ -4971,19 +5685,44 @@
           <a:lstStyle/>
           <a:p>
             <a:pPr algn="ctr"/>
-          </a:p>
-        </p:txBody>
-      </p:sp>
-      <p:sp>
-        <p:nvSpPr>
-          <p:cNvPr id="42" name="TextBox 41"/>
+            <a:endParaRPr/>
+          </a:p>
+        </p:txBody>
+      </p:sp>
+      <p:pic>
+        <p:nvPicPr>
+          <p:cNvPr id="44" name="Picture 43" descr="_qr.png"/>
+          <p:cNvPicPr>
+            <a:picLocks noChangeAspect="1"/>
+          </p:cNvPicPr>
+          <p:nvPr/>
+        </p:nvPicPr>
+        <p:blipFill>
+          <a:blip r:embed="rId5"/>
+          <a:stretch>
+            <a:fillRect/>
+          </a:stretch>
+        </p:blipFill>
+        <p:spPr>
+          <a:xfrm>
+            <a:off x="822961" y="38933952"/>
+            <a:ext cx="3200400" cy="3200400"/>
+          </a:xfrm>
+          <a:prstGeom prst="rect">
+            <a:avLst/>
+          </a:prstGeom>
+        </p:spPr>
+      </p:pic>
+      <p:sp>
+        <p:nvSpPr>
+          <p:cNvPr id="45" name="TextBox 44"/>
           <p:cNvSpPr txBox="1"/>
           <p:nvPr/>
         </p:nvSpPr>
         <p:spPr>
           <a:xfrm>
-            <a:off x="640080" y="34290000"/>
-            <a:ext cx="28995624" cy="914400"/>
+            <a:off x="4297680" y="39251330"/>
+            <a:ext cx="9875520" cy="2624308"/>
           </a:xfrm>
           <a:prstGeom prst="rect">
             <a:avLst/>
@@ -4991,7 +5730,7 @@
           <a:noFill/>
         </p:spPr>
         <p:txBody>
-          <a:bodyPr wrap="square" anchor="ctr" lIns="109728" rIns="109728" tIns="54864" bIns="54864">
+          <a:bodyPr wrap="square" lIns="109728" tIns="54864" rIns="109728" bIns="54864" anchor="ctr">
             <a:spAutoFit/>
           </a:bodyPr>
           <a:lstStyle/>
@@ -5002,27 +5741,631 @@
               </a:spcAft>
             </a:pPr>
             <a:r>
-              <a:rPr sz="3000" b="1">
-                <a:solidFill>
-                  <a:srgbClr val="FFFFFF"/>
+              <a:rPr sz="4000" b="0" dirty="0">
+                <a:solidFill>
+                  <a:srgbClr val="1B2733"/>
                 </a:solidFill>
                 <a:latin typeface="Times New Roman"/>
               </a:rPr>
-              <a:t>Data and code</a:t>
-            </a:r>
-          </a:p>
-        </p:txBody>
-      </p:sp>
-      <p:sp>
-        <p:nvSpPr>
-          <p:cNvPr id="43" name="Rounded Rectangle 42"/>
+              <a:t>GitHub repository with the dataset, per-number sources, the Python model, the reproduction notebook, this poster and a detailed report.</a:t>
+            </a:r>
+          </a:p>
+          <a:p>
+            <a:pPr algn="l">
+              <a:spcAft>
+                <a:spcPts val="400"/>
+              </a:spcAft>
+            </a:pPr>
+            <a:r>
+              <a:rPr sz="4000" b="1" dirty="0">
+                <a:solidFill>
+                  <a:srgbClr val="22406E"/>
+                </a:solidFill>
+                <a:latin typeface="Times New Roman"/>
+              </a:rPr>
+              <a:t>github.com/</a:t>
+            </a:r>
+            <a:r>
+              <a:rPr sz="4000" b="1" dirty="0" err="1">
+                <a:solidFill>
+                  <a:srgbClr val="22406E"/>
+                </a:solidFill>
+                <a:latin typeface="Times New Roman"/>
+              </a:rPr>
+              <a:t>cholevasm</a:t>
+            </a:r>
+            <a:r>
+              <a:rPr sz="4000" b="1" dirty="0">
+                <a:solidFill>
+                  <a:srgbClr val="22406E"/>
+                </a:solidFill>
+                <a:latin typeface="Times New Roman"/>
+              </a:rPr>
+              <a:t>/</a:t>
+            </a:r>
+            <a:r>
+              <a:rPr sz="4000" b="1" dirty="0" err="1">
+                <a:solidFill>
+                  <a:srgbClr val="22406E"/>
+                </a:solidFill>
+                <a:latin typeface="Times New Roman"/>
+              </a:rPr>
+              <a:t>vpl</a:t>
+            </a:r>
+            <a:r>
+              <a:rPr sz="4000" b="1" dirty="0">
+                <a:solidFill>
+                  <a:srgbClr val="22406E"/>
+                </a:solidFill>
+                <a:latin typeface="Times New Roman"/>
+              </a:rPr>
+              <a:t>-cost-model</a:t>
+            </a:r>
+          </a:p>
+        </p:txBody>
+      </p:sp>
+      <mc:AlternateContent xmlns:mc="http://schemas.openxmlformats.org/markup-compatibility/2006">
+        <mc:Choice xmlns:a14="http://schemas.microsoft.com/office/drawing/2010/main" Requires="a14">
+          <p:sp>
+            <p:nvSpPr>
+              <p:cNvPr id="47" name="TextBox 46">
+                <a:extLst>
+                  <a:ext uri="{FF2B5EF4-FFF2-40B4-BE49-F238E27FC236}">
+                    <a16:creationId xmlns:a16="http://schemas.microsoft.com/office/drawing/2014/main" id="{BCA33142-9B14-7584-47A9-39E0CCDF1FBF}"/>
+                  </a:ext>
+                </a:extLst>
+              </p:cNvPr>
+              <p:cNvSpPr txBox="1"/>
+              <p:nvPr/>
+            </p:nvSpPr>
+            <p:spPr>
+              <a:xfrm>
+                <a:off x="13684927" y="6897695"/>
+                <a:ext cx="2824565" cy="697627"/>
+              </a:xfrm>
+              <a:prstGeom prst="rect">
+                <a:avLst/>
+              </a:prstGeom>
+              <a:noFill/>
+            </p:spPr>
+            <p:txBody>
+              <a:bodyPr wrap="square">
+                <a:spAutoFit/>
+              </a:bodyPr>
+              <a:lstStyle/>
+              <a:p>
+                <a:pPr algn="l">
+                  <a:spcAft>
+                    <a:spcPts val="400"/>
+                  </a:spcAft>
+                </a:pPr>
+                <a14:m>
+                  <m:oMathPara xmlns:m="http://schemas.openxmlformats.org/officeDocument/2006/math">
+                    <m:oMathParaPr>
+                      <m:jc m:val="left"/>
+                    </m:oMathParaPr>
+                    <m:oMath xmlns:m="http://schemas.openxmlformats.org/officeDocument/2006/math">
+                      <m:r>
+                        <a:rPr lang="en-US" sz="3600" i="1" dirty="0">
+                          <a:solidFill>
+                            <a:srgbClr val="1B2733"/>
+                          </a:solidFill>
+                          <a:latin typeface="Cambria Math" panose="02040503050406030204" pitchFamily="18" charset="0"/>
+                        </a:rPr>
+                        <m:t>5</m:t>
+                      </m:r>
+                      <m:r>
+                        <a:rPr lang="de-DE" sz="3600" b="0" i="1" dirty="0" smtClean="0">
+                          <a:solidFill>
+                            <a:srgbClr val="1B2733"/>
+                          </a:solidFill>
+                          <a:latin typeface="Cambria Math" panose="02040503050406030204" pitchFamily="18" charset="0"/>
+                        </a:rPr>
+                        <m:t>.99</m:t>
+                      </m:r>
+                      <m:r>
+                        <a:rPr lang="en-US" sz="3600" b="0" i="1" dirty="0" smtClean="0">
+                          <a:solidFill>
+                            <a:srgbClr val="1B2733"/>
+                          </a:solidFill>
+                          <a:latin typeface="Cambria Math" panose="02040503050406030204" pitchFamily="18" charset="0"/>
+                        </a:rPr>
+                        <m:t>·</m:t>
+                      </m:r>
+                      <m:sSup>
+                        <m:sSupPr>
+                          <m:ctrlPr>
+                            <a:rPr lang="en-US" sz="3600" b="0" i="1" dirty="0" smtClean="0">
+                              <a:solidFill>
+                                <a:srgbClr val="1B2733"/>
+                              </a:solidFill>
+                              <a:latin typeface="Cambria Math" panose="02040503050406030204" pitchFamily="18" charset="0"/>
+                            </a:rPr>
+                          </m:ctrlPr>
+                        </m:sSupPr>
+                        <m:e>
+                          <m:r>
+                            <m:rPr>
+                              <m:sty m:val="p"/>
+                            </m:rPr>
+                            <a:rPr lang="en-US" sz="3600" b="0" i="1" dirty="0" smtClean="0">
+                              <a:solidFill>
+                                <a:srgbClr val="1B2733"/>
+                              </a:solidFill>
+                              <a:latin typeface="Cambria Math" panose="02040503050406030204" pitchFamily="18" charset="0"/>
+                            </a:rPr>
+                            <m:t>M</m:t>
+                          </m:r>
+                        </m:e>
+                        <m:sup>
+                          <m:r>
+                            <a:rPr lang="en-US" sz="3600" b="0" i="1" dirty="0" smtClean="0">
+                              <a:solidFill>
+                                <a:srgbClr val="1B2733"/>
+                              </a:solidFill>
+                              <a:latin typeface="Cambria Math" panose="02040503050406030204" pitchFamily="18" charset="0"/>
+                            </a:rPr>
+                            <m:t>0.</m:t>
+                          </m:r>
+                          <m:r>
+                            <a:rPr lang="de-DE" sz="3600" b="0" i="1" dirty="0" smtClean="0">
+                              <a:solidFill>
+                                <a:srgbClr val="1B2733"/>
+                              </a:solidFill>
+                              <a:latin typeface="Cambria Math" panose="02040503050406030204" pitchFamily="18" charset="0"/>
+                            </a:rPr>
+                            <m:t>613</m:t>
+                          </m:r>
+                        </m:sup>
+                      </m:sSup>
+                    </m:oMath>
+                  </m:oMathPara>
+                </a14:m>
+                <a:endParaRPr lang="en-US" sz="3600" b="0" i="1" dirty="0">
+                  <a:solidFill>
+                    <a:srgbClr val="1B2733"/>
+                  </a:solidFill>
+                  <a:latin typeface="Cambria Math" panose="02040503050406030204" pitchFamily="18" charset="0"/>
+                </a:endParaRPr>
+              </a:p>
+            </p:txBody>
+          </p:sp>
+        </mc:Choice>
+        <mc:Fallback>
+          <p:sp>
+            <p:nvSpPr>
+              <p:cNvPr id="47" name="TextBox 46">
+                <a:extLst>
+                  <a:ext uri="{FF2B5EF4-FFF2-40B4-BE49-F238E27FC236}">
+                    <a16:creationId xmlns:a16="http://schemas.microsoft.com/office/drawing/2014/main" id="{BCA33142-9B14-7584-47A9-39E0CCDF1FBF}"/>
+                  </a:ext>
+                </a:extLst>
+              </p:cNvPr>
+              <p:cNvSpPr txBox="1">
+                <a:spLocks noRot="1" noChangeAspect="1" noMove="1" noResize="1" noEditPoints="1" noAdjustHandles="1" noChangeArrowheads="1" noChangeShapeType="1" noTextEdit="1"/>
+              </p:cNvSpPr>
+              <p:nvPr/>
+            </p:nvSpPr>
+            <p:spPr>
+              <a:xfrm>
+                <a:off x="13684927" y="6897695"/>
+                <a:ext cx="2824565" cy="697627"/>
+              </a:xfrm>
+              <a:prstGeom prst="rect">
+                <a:avLst/>
+              </a:prstGeom>
+              <a:blipFill>
+                <a:blip r:embed="rId6"/>
+                <a:stretch>
+                  <a:fillRect/>
+                </a:stretch>
+              </a:blipFill>
+            </p:spPr>
+            <p:txBody>
+              <a:bodyPr/>
+              <a:lstStyle/>
+              <a:p>
+                <a:r>
+                  <a:rPr lang="en-US">
+                    <a:noFill/>
+                  </a:rPr>
+                  <a:t> </a:t>
+                </a:r>
+              </a:p>
+            </p:txBody>
+          </p:sp>
+        </mc:Fallback>
+      </mc:AlternateContent>
+      <mc:AlternateContent xmlns:mc="http://schemas.openxmlformats.org/markup-compatibility/2006">
+        <mc:Choice xmlns:a14="http://schemas.microsoft.com/office/drawing/2010/main" Requires="a14">
+          <p:sp>
+            <p:nvSpPr>
+              <p:cNvPr id="49" name="TextBox 48">
+                <a:extLst>
+                  <a:ext uri="{FF2B5EF4-FFF2-40B4-BE49-F238E27FC236}">
+                    <a16:creationId xmlns:a16="http://schemas.microsoft.com/office/drawing/2014/main" id="{80F3DAAA-6894-C5D4-7BB7-C43ECBE7BBCF}"/>
+                  </a:ext>
+                </a:extLst>
+              </p:cNvPr>
+              <p:cNvSpPr txBox="1"/>
+              <p:nvPr/>
+            </p:nvSpPr>
+            <p:spPr>
+              <a:xfrm>
+                <a:off x="16692372" y="6897695"/>
+                <a:ext cx="3077477" cy="646331"/>
+              </a:xfrm>
+              <a:prstGeom prst="rect">
+                <a:avLst/>
+              </a:prstGeom>
+              <a:noFill/>
+            </p:spPr>
+            <p:txBody>
+              <a:bodyPr wrap="square">
+                <a:spAutoFit/>
+              </a:bodyPr>
+              <a:lstStyle/>
+              <a:p>
+                <a:pPr/>
+                <a14:m>
+                  <m:oMathPara xmlns:m="http://schemas.openxmlformats.org/officeDocument/2006/math">
+                    <m:oMathParaPr>
+                      <m:jc m:val="centerGroup"/>
+                    </m:oMathParaPr>
+                    <m:oMath xmlns:m="http://schemas.openxmlformats.org/officeDocument/2006/math">
+                      <m:r>
+                        <a:rPr lang="de-DE" sz="3600" b="0" i="1" dirty="0" smtClean="0">
+                          <a:solidFill>
+                            <a:srgbClr val="1B2733"/>
+                          </a:solidFill>
+                          <a:latin typeface="Cambria Math" panose="02040503050406030204" pitchFamily="18" charset="0"/>
+                        </a:rPr>
+                        <m:t>0.219</m:t>
+                      </m:r>
+                      <m:r>
+                        <a:rPr lang="en-US" sz="3600" i="1" dirty="0" smtClean="0">
+                          <a:solidFill>
+                            <a:srgbClr val="1B2733"/>
+                          </a:solidFill>
+                          <a:latin typeface="Cambria Math" panose="02040503050406030204" pitchFamily="18" charset="0"/>
+                        </a:rPr>
+                        <m:t>·</m:t>
+                      </m:r>
+                      <m:sSup>
+                        <m:sSupPr>
+                          <m:ctrlPr>
+                            <a:rPr lang="en-US" sz="3600" i="1" dirty="0" smtClean="0">
+                              <a:solidFill>
+                                <a:srgbClr val="1B2733"/>
+                              </a:solidFill>
+                              <a:latin typeface="Cambria Math" panose="02040503050406030204" pitchFamily="18" charset="0"/>
+                            </a:rPr>
+                          </m:ctrlPr>
+                        </m:sSupPr>
+                        <m:e>
+                          <m:r>
+                            <m:rPr>
+                              <m:sty m:val="p"/>
+                            </m:rPr>
+                            <a:rPr lang="en-US" sz="3600" b="0" i="1" dirty="0" smtClean="0">
+                              <a:solidFill>
+                                <a:srgbClr val="1B2733"/>
+                              </a:solidFill>
+                              <a:latin typeface="Cambria Math" panose="02040503050406030204" pitchFamily="18" charset="0"/>
+                            </a:rPr>
+                            <m:t>M</m:t>
+                          </m:r>
+                        </m:e>
+                        <m:sup>
+                          <m:r>
+                            <a:rPr lang="en-US" sz="3600" b="0" i="1" dirty="0" smtClean="0">
+                              <a:solidFill>
+                                <a:srgbClr val="1B2733"/>
+                              </a:solidFill>
+                              <a:latin typeface="Cambria Math" panose="02040503050406030204" pitchFamily="18" charset="0"/>
+                            </a:rPr>
+                            <m:t>0.82</m:t>
+                          </m:r>
+                          <m:r>
+                            <a:rPr lang="de-DE" sz="3600" b="0" i="1" dirty="0" smtClean="0">
+                              <a:solidFill>
+                                <a:srgbClr val="1B2733"/>
+                              </a:solidFill>
+                              <a:latin typeface="Cambria Math" panose="02040503050406030204" pitchFamily="18" charset="0"/>
+                            </a:rPr>
+                            <m:t>8</m:t>
+                          </m:r>
+                        </m:sup>
+                      </m:sSup>
+                    </m:oMath>
+                  </m:oMathPara>
+                </a14:m>
+                <a:endParaRPr lang="en-US" sz="3600" dirty="0"/>
+              </a:p>
+            </p:txBody>
+          </p:sp>
+        </mc:Choice>
+        <mc:Fallback>
+          <p:sp>
+            <p:nvSpPr>
+              <p:cNvPr id="49" name="TextBox 48">
+                <a:extLst>
+                  <a:ext uri="{FF2B5EF4-FFF2-40B4-BE49-F238E27FC236}">
+                    <a16:creationId xmlns:a16="http://schemas.microsoft.com/office/drawing/2014/main" id="{80F3DAAA-6894-C5D4-7BB7-C43ECBE7BBCF}"/>
+                  </a:ext>
+                </a:extLst>
+              </p:cNvPr>
+              <p:cNvSpPr txBox="1">
+                <a:spLocks noRot="1" noChangeAspect="1" noMove="1" noResize="1" noEditPoints="1" noAdjustHandles="1" noChangeArrowheads="1" noChangeShapeType="1" noTextEdit="1"/>
+              </p:cNvSpPr>
+              <p:nvPr/>
+            </p:nvSpPr>
+            <p:spPr>
+              <a:xfrm>
+                <a:off x="16692372" y="6897695"/>
+                <a:ext cx="3077477" cy="646331"/>
+              </a:xfrm>
+              <a:prstGeom prst="rect">
+                <a:avLst/>
+              </a:prstGeom>
+              <a:blipFill>
+                <a:blip r:embed="rId7"/>
+                <a:stretch>
+                  <a:fillRect/>
+                </a:stretch>
+              </a:blipFill>
+            </p:spPr>
+            <p:txBody>
+              <a:bodyPr/>
+              <a:lstStyle/>
+              <a:p>
+                <a:r>
+                  <a:rPr lang="en-US">
+                    <a:noFill/>
+                  </a:rPr>
+                  <a:t> </a:t>
+                </a:r>
+              </a:p>
+            </p:txBody>
+          </p:sp>
+        </mc:Fallback>
+      </mc:AlternateContent>
+      <p:sp>
+        <p:nvSpPr>
+          <p:cNvPr id="50" name="Left Brace 49">
+            <a:extLst>
+              <a:ext uri="{FF2B5EF4-FFF2-40B4-BE49-F238E27FC236}">
+                <a16:creationId xmlns:a16="http://schemas.microsoft.com/office/drawing/2014/main" id="{AA8D2922-11BC-5469-2D85-54B3AAA3EA51}"/>
+              </a:ext>
+            </a:extLst>
+          </p:cNvPr>
           <p:cNvSpPr/>
           <p:nvPr/>
         </p:nvSpPr>
         <p:spPr>
-          <a:xfrm>
-            <a:off x="640080" y="35341560"/>
-            <a:ext cx="28995624" cy="3840480"/>
+          <a:xfrm rot="16200000" flipH="1">
+            <a:off x="14808291" y="5421883"/>
+            <a:ext cx="363169" cy="2588453"/>
+          </a:xfrm>
+          <a:prstGeom prst="leftBrace">
+            <a:avLst/>
+          </a:prstGeom>
+          <a:ln w="38100">
+            <a:solidFill>
+              <a:schemeClr val="tx1"/>
+            </a:solidFill>
+          </a:ln>
+        </p:spPr>
+        <p:style>
+          <a:lnRef idx="2">
+            <a:schemeClr val="accent1"/>
+          </a:lnRef>
+          <a:fillRef idx="0">
+            <a:schemeClr val="accent1"/>
+          </a:fillRef>
+          <a:effectRef idx="1">
+            <a:schemeClr val="accent1"/>
+          </a:effectRef>
+          <a:fontRef idx="minor">
+            <a:schemeClr val="tx1"/>
+          </a:fontRef>
+        </p:style>
+        <p:txBody>
+          <a:bodyPr rtlCol="0" anchor="ctr"/>
+          <a:lstStyle/>
+          <a:p>
+            <a:pPr algn="ctr"/>
+            <a:endParaRPr lang="en-US"/>
+          </a:p>
+        </p:txBody>
+      </p:sp>
+      <p:sp>
+        <p:nvSpPr>
+          <p:cNvPr id="51" name="Left Brace 50">
+            <a:extLst>
+              <a:ext uri="{FF2B5EF4-FFF2-40B4-BE49-F238E27FC236}">
+                <a16:creationId xmlns:a16="http://schemas.microsoft.com/office/drawing/2014/main" id="{1369D8B3-D52C-3C74-457C-061916BCC942}"/>
+              </a:ext>
+            </a:extLst>
+          </p:cNvPr>
+          <p:cNvSpPr/>
+          <p:nvPr/>
+        </p:nvSpPr>
+        <p:spPr>
+          <a:xfrm rot="16200000" flipH="1">
+            <a:off x="18123604" y="5421883"/>
+            <a:ext cx="363169" cy="2588453"/>
+          </a:xfrm>
+          <a:prstGeom prst="leftBrace">
+            <a:avLst/>
+          </a:prstGeom>
+          <a:ln w="38100">
+            <a:solidFill>
+              <a:schemeClr val="tx1"/>
+            </a:solidFill>
+          </a:ln>
+        </p:spPr>
+        <p:style>
+          <a:lnRef idx="2">
+            <a:schemeClr val="accent1"/>
+          </a:lnRef>
+          <a:fillRef idx="0">
+            <a:schemeClr val="accent1"/>
+          </a:fillRef>
+          <a:effectRef idx="1">
+            <a:schemeClr val="accent1"/>
+          </a:effectRef>
+          <a:fontRef idx="minor">
+            <a:schemeClr val="tx1"/>
+          </a:fontRef>
+        </p:style>
+        <p:txBody>
+          <a:bodyPr rtlCol="0" anchor="ctr"/>
+          <a:lstStyle/>
+          <a:p>
+            <a:pPr algn="ctr"/>
+            <a:endParaRPr lang="en-US"/>
+          </a:p>
+        </p:txBody>
+      </p:sp>
+      <p:sp>
+        <p:nvSpPr>
+          <p:cNvPr id="52" name="Rounded Rectangle 40">
+            <a:extLst>
+              <a:ext uri="{FF2B5EF4-FFF2-40B4-BE49-F238E27FC236}">
+                <a16:creationId xmlns:a16="http://schemas.microsoft.com/office/drawing/2014/main" id="{DF344C5F-65BE-78DB-1032-2D67BC798AE6}"/>
+              </a:ext>
+            </a:extLst>
+          </p:cNvPr>
+          <p:cNvSpPr/>
+          <p:nvPr/>
+        </p:nvSpPr>
+        <p:spPr>
+          <a:xfrm>
+            <a:off x="15645724" y="37591683"/>
+            <a:ext cx="13989980" cy="914400"/>
+          </a:xfrm>
+          <a:prstGeom prst="roundRect">
+            <a:avLst>
+              <a:gd name="adj" fmla="val 4000"/>
+            </a:avLst>
+          </a:prstGeom>
+          <a:gradFill>
+            <a:gsLst>
+              <a:gs pos="0">
+                <a:srgbClr val="0D5EAF"/>
+              </a:gs>
+              <a:gs pos="100000">
+                <a:srgbClr val="0C549C"/>
+              </a:gs>
+            </a:gsLst>
+            <a:lin ang="5400000" scaled="0"/>
+          </a:gradFill>
+          <a:ln>
+            <a:noFill/>
+          </a:ln>
+          <a:effectLst/>
+        </p:spPr>
+        <p:style>
+          <a:lnRef idx="1">
+            <a:schemeClr val="accent1"/>
+          </a:lnRef>
+          <a:fillRef idx="3">
+            <a:schemeClr val="accent1"/>
+          </a:fillRef>
+          <a:effectRef idx="2">
+            <a:schemeClr val="accent1"/>
+          </a:effectRef>
+          <a:fontRef idx="minor">
+            <a:schemeClr val="lt1"/>
+          </a:fontRef>
+        </p:style>
+        <p:txBody>
+          <a:bodyPr rtlCol="0" anchor="ctr"/>
+          <a:lstStyle/>
+          <a:p>
+            <a:pPr algn="ctr"/>
+            <a:endParaRPr/>
+          </a:p>
+        </p:txBody>
+      </p:sp>
+      <p:sp>
+        <p:nvSpPr>
+          <p:cNvPr id="53" name="TextBox 52">
+            <a:extLst>
+              <a:ext uri="{FF2B5EF4-FFF2-40B4-BE49-F238E27FC236}">
+                <a16:creationId xmlns:a16="http://schemas.microsoft.com/office/drawing/2014/main" id="{040F58D4-C12D-0787-04CB-6FBB7FA7CE8B}"/>
+              </a:ext>
+            </a:extLst>
+          </p:cNvPr>
+          <p:cNvSpPr txBox="1"/>
+          <p:nvPr/>
+        </p:nvSpPr>
+        <p:spPr>
+          <a:xfrm>
+            <a:off x="15645724" y="37531819"/>
+            <a:ext cx="13989980" cy="1034129"/>
+          </a:xfrm>
+          <a:prstGeom prst="rect">
+            <a:avLst/>
+          </a:prstGeom>
+          <a:gradFill>
+            <a:gsLst>
+              <a:gs pos="0">
+                <a:srgbClr val="0D5EAF"/>
+              </a:gs>
+              <a:gs pos="100000">
+                <a:srgbClr val="0C549C"/>
+              </a:gs>
+            </a:gsLst>
+            <a:lin ang="5400000" scaled="0"/>
+          </a:gradFill>
+        </p:spPr>
+        <p:txBody>
+          <a:bodyPr wrap="square" lIns="109728" tIns="54864" rIns="109728" bIns="54864" anchor="ctr">
+            <a:spAutoFit/>
+          </a:bodyPr>
+          <a:lstStyle/>
+          <a:p>
+            <a:pPr algn="l">
+              <a:spcAft>
+                <a:spcPts val="400"/>
+              </a:spcAft>
+            </a:pPr>
+            <a:r>
+              <a:rPr lang="en-US" sz="6000" b="1" dirty="0">
+                <a:solidFill>
+                  <a:srgbClr val="FFFFFF"/>
+                </a:solidFill>
+                <a:latin typeface="Times New Roman"/>
+              </a:rPr>
+              <a:t>Autor Contact</a:t>
+            </a:r>
+            <a:endParaRPr sz="6000" b="1" dirty="0">
+              <a:solidFill>
+                <a:srgbClr val="FFFFFF"/>
+              </a:solidFill>
+              <a:latin typeface="Times New Roman"/>
+            </a:endParaRPr>
+          </a:p>
+        </p:txBody>
+      </p:sp>
+      <p:sp>
+        <p:nvSpPr>
+          <p:cNvPr id="54" name="Rounded Rectangle 42">
+            <a:extLst>
+              <a:ext uri="{FF2B5EF4-FFF2-40B4-BE49-F238E27FC236}">
+                <a16:creationId xmlns:a16="http://schemas.microsoft.com/office/drawing/2014/main" id="{66303CA4-839A-1E64-9C54-9CEF0035DC78}"/>
+              </a:ext>
+            </a:extLst>
+          </p:cNvPr>
+          <p:cNvSpPr/>
+          <p:nvPr/>
+        </p:nvSpPr>
+        <p:spPr>
+          <a:xfrm>
+            <a:off x="15664266" y="38643243"/>
+            <a:ext cx="6592484" cy="3840480"/>
           </a:xfrm>
           <a:prstGeom prst="roundRect">
             <a:avLst>
@@ -5058,26 +6401,32 @@
           <a:lstStyle/>
           <a:p>
             <a:pPr algn="ctr"/>
+            <a:endParaRPr/>
           </a:p>
         </p:txBody>
       </p:sp>
       <p:pic>
         <p:nvPicPr>
-          <p:cNvPr id="44" name="Picture 43" descr="_qr.png"/>
+          <p:cNvPr id="55" name="Picture 54">
+            <a:extLst>
+              <a:ext uri="{FF2B5EF4-FFF2-40B4-BE49-F238E27FC236}">
+                <a16:creationId xmlns:a16="http://schemas.microsoft.com/office/drawing/2014/main" id="{48BDB63D-CA2F-EB4F-B0F2-26E3A5584A94}"/>
+              </a:ext>
+            </a:extLst>
+          </p:cNvPr>
           <p:cNvPicPr>
             <a:picLocks noChangeAspect="1"/>
           </p:cNvPicPr>
           <p:nvPr/>
         </p:nvPicPr>
         <p:blipFill>
-          <a:blip r:embed="rId6"/>
-          <a:stretch>
-            <a:fillRect/>
-          </a:stretch>
+          <a:blip r:embed="rId8"/>
+          <a:srcRect/>
+          <a:stretch/>
         </p:blipFill>
         <p:spPr>
           <a:xfrm>
-            <a:off x="914400" y="35661600"/>
+            <a:off x="15920043" y="38963283"/>
             <a:ext cx="3200400" cy="3200400"/>
           </a:xfrm>
           <a:prstGeom prst="rect">
@@ -5087,14 +6436,20 @@
       </p:pic>
       <p:sp>
         <p:nvSpPr>
-          <p:cNvPr id="45" name="TextBox 44"/>
+          <p:cNvPr id="56" name="TextBox 55">
+            <a:extLst>
+              <a:ext uri="{FF2B5EF4-FFF2-40B4-BE49-F238E27FC236}">
+                <a16:creationId xmlns:a16="http://schemas.microsoft.com/office/drawing/2014/main" id="{3A42A74B-51C2-6832-F78B-52489ADDDBE7}"/>
+              </a:ext>
+            </a:extLst>
+          </p:cNvPr>
           <p:cNvSpPr txBox="1"/>
           <p:nvPr/>
         </p:nvSpPr>
         <p:spPr>
           <a:xfrm>
-            <a:off x="4572000" y="35707320"/>
-            <a:ext cx="24789384" cy="3108960"/>
+            <a:off x="19577643" y="39892531"/>
+            <a:ext cx="2139357" cy="1341906"/>
           </a:xfrm>
           <a:prstGeom prst="rect">
             <a:avLst/>
@@ -5102,7 +6457,7 @@
           <a:noFill/>
         </p:spPr>
         <p:txBody>
-          <a:bodyPr wrap="square" anchor="ctr" lIns="109728" rIns="109728" tIns="54864" bIns="54864">
+          <a:bodyPr wrap="square" lIns="109728" tIns="54864" rIns="109728" bIns="54864" anchor="ctr">
             <a:spAutoFit/>
           </a:bodyPr>
           <a:lstStyle/>
@@ -5113,33 +6468,204 @@
               </a:spcAft>
             </a:pPr>
             <a:r>
-              <a:rPr sz="2400" b="0">
+              <a:rPr lang="en-US" sz="4000" b="0" dirty="0">
                 <a:solidFill>
                   <a:srgbClr val="1B2733"/>
                 </a:solidFill>
                 <a:latin typeface="Times New Roman"/>
               </a:rPr>
-              <a:t>GitHub repository with the dataset, per-number sources, the Python model, the reproduction notebook, this poster and a detailed report.</a:t>
-            </a:r>
-          </a:p>
-          <a:p>
-            <a:pPr algn="l">
+              <a:t>Minas Cholevas</a:t>
+            </a:r>
+            <a:endParaRPr sz="4000" b="1" dirty="0">
+              <a:solidFill>
+                <a:srgbClr val="22406E"/>
+              </a:solidFill>
+              <a:latin typeface="Times New Roman"/>
+            </a:endParaRPr>
+          </a:p>
+        </p:txBody>
+      </p:sp>
+      <p:pic>
+        <p:nvPicPr>
+          <p:cNvPr id="57" name="Picture 56">
+            <a:extLst>
+              <a:ext uri="{FF2B5EF4-FFF2-40B4-BE49-F238E27FC236}">
+                <a16:creationId xmlns:a16="http://schemas.microsoft.com/office/drawing/2014/main" id="{7AE786C7-A021-49A4-5AA6-DA0047688C2E}"/>
+              </a:ext>
+            </a:extLst>
+          </p:cNvPr>
+          <p:cNvPicPr>
+            <a:picLocks noChangeAspect="1"/>
+          </p:cNvPicPr>
+          <p:nvPr/>
+        </p:nvPicPr>
+        <p:blipFill>
+          <a:blip r:embed="rId9"/>
+          <a:srcRect/>
+          <a:stretch/>
+        </p:blipFill>
+        <p:spPr>
+          <a:xfrm>
+            <a:off x="25977533" y="38963283"/>
+            <a:ext cx="3200400" cy="3200400"/>
+          </a:xfrm>
+          <a:prstGeom prst="rect">
+            <a:avLst/>
+          </a:prstGeom>
+        </p:spPr>
+      </p:pic>
+      <p:sp>
+        <p:nvSpPr>
+          <p:cNvPr id="58" name="TextBox 57">
+            <a:extLst>
+              <a:ext uri="{FF2B5EF4-FFF2-40B4-BE49-F238E27FC236}">
+                <a16:creationId xmlns:a16="http://schemas.microsoft.com/office/drawing/2014/main" id="{43A32C5A-1655-D969-2414-9F91C37FEDCB}"/>
+              </a:ext>
+            </a:extLst>
+          </p:cNvPr>
+          <p:cNvSpPr txBox="1"/>
+          <p:nvPr/>
+        </p:nvSpPr>
+        <p:spPr>
+          <a:xfrm>
+            <a:off x="22860001" y="39892531"/>
+            <a:ext cx="2659762" cy="1341906"/>
+          </a:xfrm>
+          <a:prstGeom prst="rect">
+            <a:avLst/>
+          </a:prstGeom>
+          <a:noFill/>
+        </p:spPr>
+        <p:txBody>
+          <a:bodyPr wrap="square" lIns="109728" tIns="54864" rIns="109728" bIns="54864" anchor="ctr">
+            <a:spAutoFit/>
+          </a:bodyPr>
+          <a:lstStyle/>
+          <a:p>
+            <a:pPr algn="r">
               <a:spcAft>
                 <a:spcPts val="400"/>
               </a:spcAft>
             </a:pPr>
             <a:r>
-              <a:rPr sz="2600" b="1">
-                <a:solidFill>
-                  <a:srgbClr val="22406E"/>
+              <a:rPr lang="en-US" sz="4000" b="0" dirty="0">
+                <a:solidFill>
+                  <a:srgbClr val="1B2733"/>
                 </a:solidFill>
                 <a:latin typeface="Times New Roman"/>
               </a:rPr>
-              <a:t>github.com/cholevasm/vpl-cost-model</a:t>
-            </a:r>
-          </a:p>
-        </p:txBody>
-      </p:sp>
+              <a:t>Giannis </a:t>
+            </a:r>
+            <a:r>
+              <a:rPr lang="en-US" sz="4000" b="0" dirty="0" err="1">
+                <a:solidFill>
+                  <a:srgbClr val="1B2733"/>
+                </a:solidFill>
+                <a:latin typeface="Times New Roman"/>
+              </a:rPr>
+              <a:t>Vardanikas</a:t>
+            </a:r>
+            <a:endParaRPr sz="4000" b="1" dirty="0">
+              <a:solidFill>
+                <a:srgbClr val="22406E"/>
+              </a:solidFill>
+              <a:latin typeface="Times New Roman"/>
+            </a:endParaRPr>
+          </a:p>
+        </p:txBody>
+      </p:sp>
+      <p:pic>
+        <p:nvPicPr>
+          <p:cNvPr id="61" name="Picture 60" descr="The Propagation Laboratory or It Is Upon Us.&#10;&#10;AI-generated content may be incorrect.">
+            <a:extLst>
+              <a:ext uri="{FF2B5EF4-FFF2-40B4-BE49-F238E27FC236}">
+                <a16:creationId xmlns:a16="http://schemas.microsoft.com/office/drawing/2014/main" id="{B2A9BC4E-73DF-2628-F9EE-05A8A41386D0}"/>
+              </a:ext>
+            </a:extLst>
+          </p:cNvPr>
+          <p:cNvPicPr>
+            <a:picLocks noChangeAspect="1"/>
+          </p:cNvPicPr>
+          <p:nvPr/>
+        </p:nvPicPr>
+        <p:blipFill>
+          <a:blip r:embed="rId10"/>
+          <a:srcRect l="3618" t="3473" r="6053" b="5025"/>
+          <a:stretch>
+            <a:fillRect/>
+          </a:stretch>
+        </p:blipFill>
+        <p:spPr>
+          <a:xfrm>
+            <a:off x="25977533" y="454867"/>
+            <a:ext cx="3844716" cy="3894720"/>
+          </a:xfrm>
+          <a:prstGeom prst="rect">
+            <a:avLst/>
+          </a:prstGeom>
+          <a:noFill/>
+        </p:spPr>
+      </p:pic>
+      <p:pic>
+        <p:nvPicPr>
+          <p:cNvPr id="60" name="Picture 59" descr="A_validation.png">
+            <a:extLst>
+              <a:ext uri="{FF2B5EF4-FFF2-40B4-BE49-F238E27FC236}">
+                <a16:creationId xmlns:a16="http://schemas.microsoft.com/office/drawing/2014/main" id="{E87EBE50-305E-EF23-4861-BE17F539A102}"/>
+              </a:ext>
+            </a:extLst>
+          </p:cNvPr>
+          <p:cNvPicPr>
+            <a:picLocks noChangeAspect="1"/>
+          </p:cNvPicPr>
+          <p:nvPr/>
+        </p:nvPicPr>
+        <p:blipFill>
+          <a:blip r:embed="rId11"/>
+          <a:stretch>
+            <a:fillRect/>
+          </a:stretch>
+        </p:blipFill>
+        <p:spPr>
+          <a:xfrm>
+            <a:off x="15572826" y="12390120"/>
+            <a:ext cx="14062877" cy="6986308"/>
+          </a:xfrm>
+          <a:prstGeom prst="rect">
+            <a:avLst/>
+          </a:prstGeom>
+        </p:spPr>
+      </p:pic>
+      <p:pic>
+        <p:nvPicPr>
+          <p:cNvPr id="63" name="Picture 62" descr="F_heatmap.png">
+            <a:extLst>
+              <a:ext uri="{FF2B5EF4-FFF2-40B4-BE49-F238E27FC236}">
+                <a16:creationId xmlns:a16="http://schemas.microsoft.com/office/drawing/2014/main" id="{44D25B1C-D6E1-6A34-FBC2-9C4B44E86E53}"/>
+              </a:ext>
+            </a:extLst>
+          </p:cNvPr>
+          <p:cNvPicPr>
+            <a:picLocks noChangeAspect="1"/>
+          </p:cNvPicPr>
+          <p:nvPr/>
+        </p:nvPicPr>
+        <p:blipFill>
+          <a:blip r:embed="rId12"/>
+          <a:stretch>
+            <a:fillRect/>
+          </a:stretch>
+        </p:blipFill>
+        <p:spPr>
+          <a:xfrm>
+            <a:off x="15607031" y="22077049"/>
+            <a:ext cx="14062877" cy="5950090"/>
+          </a:xfrm>
+          <a:prstGeom prst="rect">
+            <a:avLst/>
+          </a:prstGeom>
+        </p:spPr>
+      </p:pic>
     </p:spTree>
   </p:cSld>
   <p:clrMapOvr>
